--- a/Soutenance/Ohmyfood_Soutenance.pptx
+++ b/Soutenance/Ohmyfood_Soutenance.pptx
@@ -4,6 +4,9 @@
   <p:sldMasterIdLst>
     <p:sldMasterId id="2147483648" r:id="rId1"/>
   </p:sldMasterIdLst>
+  <p:notesMasterIdLst>
+    <p:notesMasterId r:id="rId15"/>
+  </p:notesMasterIdLst>
   <p:sldIdLst>
     <p:sldId id="256" r:id="rId2"/>
     <p:sldId id="257" r:id="rId3"/>
@@ -19,10 +22,7 @@
     <p:sldId id="267" r:id="rId13"/>
     <p:sldId id="268" r:id="rId14"/>
   </p:sldIdLst>
-  <p:notesMasterIdLst>
-    <p:notesMasterId r:id="rId15"/>
-  </p:notesMasterIdLst>
-  <p:sldSz cx="9144000" cy="5143500"/>
+  <p:sldSz cx="9144000" cy="5143500" type="screen16x9"/>
   <p:notesSz cx="5143500" cy="9144000"/>
   <p:defaultTextStyle>
     <a:lvl1pPr marL="0" algn="l" defTabSz="914400" rtl="0" eaLnBrk="1" latinLnBrk="0" hangingPunct="1">
@@ -116,6 +116,11 @@
       </a:defRPr>
     </a:lvl9pPr>
   </p:defaultTextStyle>
+  <p:extLst>
+    <p:ext uri="{EFAFB233-063F-42B5-8137-9DF3F51BA10A}">
+      <p15:sldGuideLst xmlns:p15="http://schemas.microsoft.com/office/powerpoint/2012/main"/>
+    </p:ext>
+  </p:extLst>
 </p:presentation>
 </file>
 
@@ -141,234 +146,10 @@
           <a:chExt cx="0" cy="0"/>
         </a:xfrm>
       </p:grpSpPr>
-      <p:sp>
-        <p:nvSpPr>
-          <p:cNvPr id="2" name="Header Placeholder 1"/>
-          <p:cNvSpPr>
-            <a:spLocks noGrp="1"/>
-          </p:cNvSpPr>
-          <p:nvPr>
-            <p:ph type="hdr" sz="quarter"/>
-          </p:nvPr>
-        </p:nvSpPr>
-        <p:spPr>
-          <a:xfrm>
-            <a:off x="0" y="0"/>
-            <a:ext cx="2971800" cy="458788"/>
-          </a:xfrm>
-          <a:prstGeom prst="rect">
-            <a:avLst/>
-          </a:prstGeom>
-        </p:spPr>
-        <p:txBody>
-          <a:bodyPr vert="horz" lIns="91440" tIns="45720" rIns="91440" bIns="45720" rtlCol="0"/>
-          <a:lstStyle>
-            <a:lvl1pPr algn="l">
-              <a:defRPr sz="1200"/>
-            </a:lvl1pPr>
-          </a:lstStyle>
-          <a:p>
-            <a:endParaRPr lang="en-US"/>
-          </a:p>
-        </p:txBody>
-      </p:sp>
-      <p:sp>
-        <p:nvSpPr>
-          <p:cNvPr id="3" name="Date Placeholder 2"/>
-          <p:cNvSpPr>
-            <a:spLocks noGrp="1"/>
-          </p:cNvSpPr>
-          <p:nvPr>
-            <p:ph type="dt" idx="1"/>
-          </p:nvPr>
-        </p:nvSpPr>
-        <p:spPr>
-          <a:xfrm>
-            <a:off x="3884613" y="0"/>
-            <a:ext cx="2971800" cy="458788"/>
-          </a:xfrm>
-          <a:prstGeom prst="rect">
-            <a:avLst/>
-          </a:prstGeom>
-        </p:spPr>
-        <p:txBody>
-          <a:bodyPr vert="horz" lIns="91440" tIns="45720" rIns="91440" bIns="45720" rtlCol="0"/>
-          <a:lstStyle>
-            <a:lvl1pPr algn="r">
-              <a:defRPr sz="1200"/>
-            </a:lvl1pPr>
-          </a:lstStyle>
-          <a:p>
-            <a:fld id="{5282F153-3F37-0F45-9E97-73ACFA13230C}" type="datetimeFigureOut">
-              <a:rPr lang="en-US"/>
-              <a:t>7/23/19</a:t>
-            </a:fld>
-            <a:endParaRPr lang="en-US"/>
-          </a:p>
-        </p:txBody>
-      </p:sp>
-      <p:sp>
-        <p:nvSpPr>
-          <p:cNvPr id="4" name="Slide Image Placeholder 3"/>
-          <p:cNvSpPr>
-            <a:spLocks noGrp="1" noRot="1" noChangeAspect="1"/>
-          </p:cNvSpPr>
-          <p:nvPr>
-            <p:ph type="sldImg" idx="2"/>
-          </p:nvPr>
-        </p:nvSpPr>
-        <p:spPr>
-          <a:xfrm>
-            <a:off x="685800" y="1143000"/>
-            <a:ext cx="5486400" cy="3086100"/>
-          </a:xfrm>
-          <a:prstGeom prst="rect">
-            <a:avLst/>
-          </a:prstGeom>
-          <a:noFill/>
-          <a:ln w="12700">
-            <a:solidFill>
-              <a:prstClr val="black"/>
-            </a:solidFill>
-          </a:ln>
-        </p:spPr>
-        <p:txBody>
-          <a:bodyPr vert="horz" lIns="91440" tIns="45720" rIns="91440" bIns="45720" rtlCol="0" anchor="ctr"/>
-          <a:lstStyle/>
-          <a:p>
-            <a:endParaRPr lang="en-US"/>
-          </a:p>
-        </p:txBody>
-      </p:sp>
-      <p:sp>
-        <p:nvSpPr>
-          <p:cNvPr id="5" name="Notes Placeholder 4"/>
-          <p:cNvSpPr>
-            <a:spLocks noGrp="1"/>
-          </p:cNvSpPr>
-          <p:nvPr>
-            <p:ph type="body" sz="quarter" idx="3"/>
-          </p:nvPr>
-        </p:nvSpPr>
-        <p:spPr>
-          <a:xfrm>
-            <a:off x="685800" y="4400550"/>
-            <a:ext cx="5486400" cy="3600450"/>
-          </a:xfrm>
-          <a:prstGeom prst="rect">
-            <a:avLst/>
-          </a:prstGeom>
-        </p:spPr>
-        <p:txBody>
-          <a:bodyPr vert="horz" lIns="91440" tIns="45720" rIns="91440" bIns="45720" rtlCol="0"/>
-          <a:lstStyle/>
-          <a:p>
-            <a:pPr lvl="0"/>
-            <a:r>
-              <a:rPr lang="en-US"/>
-              <a:t>Click to edit Master text styles</a:t>
-            </a:r>
-          </a:p>
-          <a:p>
-            <a:pPr lvl="1"/>
-            <a:r>
-              <a:rPr lang="en-US"/>
-              <a:t>Second level</a:t>
-            </a:r>
-          </a:p>
-          <a:p>
-            <a:pPr lvl="2"/>
-            <a:r>
-              <a:rPr lang="en-US"/>
-              <a:t>Third level</a:t>
-            </a:r>
-          </a:p>
-          <a:p>
-            <a:pPr lvl="3"/>
-            <a:r>
-              <a:rPr lang="en-US"/>
-              <a:t>Fourth level</a:t>
-            </a:r>
-          </a:p>
-          <a:p>
-            <a:pPr lvl="4"/>
-            <a:r>
-              <a:rPr lang="en-US"/>
-              <a:t>Fifth level</a:t>
-            </a:r>
-          </a:p>
-        </p:txBody>
-      </p:sp>
-      <p:sp>
-        <p:nvSpPr>
-          <p:cNvPr id="6" name="Footer Placeholder 5"/>
-          <p:cNvSpPr>
-            <a:spLocks noGrp="1"/>
-          </p:cNvSpPr>
-          <p:nvPr>
-            <p:ph type="ftr" sz="quarter" idx="4"/>
-          </p:nvPr>
-        </p:nvSpPr>
-        <p:spPr>
-          <a:xfrm>
-            <a:off x="0" y="8685213"/>
-            <a:ext cx="2971800" cy="458787"/>
-          </a:xfrm>
-          <a:prstGeom prst="rect">
-            <a:avLst/>
-          </a:prstGeom>
-        </p:spPr>
-        <p:txBody>
-          <a:bodyPr vert="horz" lIns="91440" tIns="45720" rIns="91440" bIns="45720" rtlCol="0" anchor="b"/>
-          <a:lstStyle>
-            <a:lvl1pPr algn="l">
-              <a:defRPr sz="1200"/>
-            </a:lvl1pPr>
-          </a:lstStyle>
-          <a:p>
-            <a:endParaRPr lang="en-US"/>
-          </a:p>
-        </p:txBody>
-      </p:sp>
-      <p:sp>
-        <p:nvSpPr>
-          <p:cNvPr id="7" name="Slide Number Placeholder 6"/>
-          <p:cNvSpPr>
-            <a:spLocks noGrp="1"/>
-          </p:cNvSpPr>
-          <p:nvPr>
-            <p:ph type="sldNum" sz="quarter" idx="5"/>
-          </p:nvPr>
-        </p:nvSpPr>
-        <p:spPr>
-          <a:xfrm>
-            <a:off x="3884613" y="8685213"/>
-            <a:ext cx="2971800" cy="458787"/>
-          </a:xfrm>
-          <a:prstGeom prst="rect">
-            <a:avLst/>
-          </a:prstGeom>
-        </p:spPr>
-        <p:txBody>
-          <a:bodyPr vert="horz" lIns="91440" tIns="45720" rIns="91440" bIns="45720" rtlCol="0" anchor="b"/>
-          <a:lstStyle>
-            <a:lvl1pPr algn="r">
-              <a:defRPr sz="1200"/>
-            </a:lvl1pPr>
-          </a:lstStyle>
-          <a:p>
-            <a:fld id="{CE5E9CC1-C706-0F49-92D6-E571CC5EEA8F}" type="slidenum">
-              <a:rPr lang="en-US"/>
-              <a:t>‹#›</a:t>
-            </a:fld>
-            <a:endParaRPr lang="en-US"/>
-          </a:p>
-        </p:txBody>
-      </p:sp>
     </p:spTree>
     <p:extLst>
       <p:ext uri="{BB962C8B-B14F-4D97-AF65-F5344CB8AC3E}">
-        <p14:creationId xmlns:p14="http://schemas.microsoft.com/office/powerpoint/2010/main" val="1024086991"/>
+        <p14:creationId xmlns:p14="http://schemas.microsoft.com/office/powerpoint/2010/main" val="4254041678"/>
       </p:ext>
     </p:extLst>
   </p:cSld>
@@ -512,10 +293,6 @@
           <a:bodyPr/>
           <a:lstStyle/>
           <a:p>
-            <a:r>
-              <a:rPr lang="en-US" dirty="0"/>
-              <a:t/>
-            </a:r>
             <a:endParaRPr lang="en-US" dirty="0"/>
           </a:p>
         </p:txBody>
@@ -600,10 +377,6 @@
           <a:bodyPr/>
           <a:lstStyle/>
           <a:p>
-            <a:r>
-              <a:rPr lang="en-US" dirty="0"/>
-              <a:t/>
-            </a:r>
             <a:endParaRPr lang="en-US" dirty="0"/>
           </a:p>
         </p:txBody>
@@ -688,10 +461,6 @@
           <a:bodyPr/>
           <a:lstStyle/>
           <a:p>
-            <a:r>
-              <a:rPr lang="en-US" dirty="0"/>
-              <a:t/>
-            </a:r>
             <a:endParaRPr lang="en-US" dirty="0"/>
           </a:p>
         </p:txBody>
@@ -776,10 +545,6 @@
           <a:bodyPr/>
           <a:lstStyle/>
           <a:p>
-            <a:r>
-              <a:rPr lang="en-US" dirty="0"/>
-              <a:t/>
-            </a:r>
             <a:endParaRPr lang="en-US" dirty="0"/>
           </a:p>
         </p:txBody>
@@ -864,10 +629,6 @@
           <a:bodyPr/>
           <a:lstStyle/>
           <a:p>
-            <a:r>
-              <a:rPr lang="en-US" dirty="0"/>
-              <a:t/>
-            </a:r>
             <a:endParaRPr lang="en-US" dirty="0"/>
           </a:p>
         </p:txBody>
@@ -952,10 +713,6 @@
           <a:bodyPr/>
           <a:lstStyle/>
           <a:p>
-            <a:r>
-              <a:rPr lang="en-US" dirty="0"/>
-              <a:t/>
-            </a:r>
             <a:endParaRPr lang="en-US" dirty="0"/>
           </a:p>
         </p:txBody>
@@ -1040,10 +797,6 @@
           <a:bodyPr/>
           <a:lstStyle/>
           <a:p>
-            <a:r>
-              <a:rPr lang="en-US" dirty="0"/>
-              <a:t/>
-            </a:r>
             <a:endParaRPr lang="en-US" dirty="0"/>
           </a:p>
         </p:txBody>
@@ -1128,10 +881,6 @@
           <a:bodyPr/>
           <a:lstStyle/>
           <a:p>
-            <a:r>
-              <a:rPr lang="en-US" dirty="0"/>
-              <a:t/>
-            </a:r>
             <a:endParaRPr lang="en-US" dirty="0"/>
           </a:p>
         </p:txBody>
@@ -1216,10 +965,6 @@
           <a:bodyPr/>
           <a:lstStyle/>
           <a:p>
-            <a:r>
-              <a:rPr lang="en-US" dirty="0"/>
-              <a:t/>
-            </a:r>
             <a:endParaRPr lang="en-US" dirty="0"/>
           </a:p>
         </p:txBody>
@@ -1304,10 +1049,6 @@
           <a:bodyPr/>
           <a:lstStyle/>
           <a:p>
-            <a:r>
-              <a:rPr lang="en-US" dirty="0"/>
-              <a:t/>
-            </a:r>
             <a:endParaRPr lang="en-US" dirty="0"/>
           </a:p>
         </p:txBody>
@@ -1392,10 +1133,6 @@
           <a:bodyPr/>
           <a:lstStyle/>
           <a:p>
-            <a:r>
-              <a:rPr lang="en-US" dirty="0"/>
-              <a:t/>
-            </a:r>
             <a:endParaRPr lang="en-US" dirty="0"/>
           </a:p>
         </p:txBody>
@@ -1480,10 +1217,6 @@
           <a:bodyPr/>
           <a:lstStyle/>
           <a:p>
-            <a:r>
-              <a:rPr lang="en-US" dirty="0"/>
-              <a:t/>
-            </a:r>
             <a:endParaRPr lang="en-US" dirty="0"/>
           </a:p>
         </p:txBody>
@@ -1568,10 +1301,6 @@
           <a:bodyPr/>
           <a:lstStyle/>
           <a:p>
-            <a:r>
-              <a:rPr lang="en-US" dirty="0"/>
-              <a:t/>
-            </a:r>
             <a:endParaRPr lang="en-US" dirty="0"/>
           </a:p>
         </p:txBody>
@@ -1645,6 +1374,11 @@
 <file path=ppt/slideMasters/slideMaster1.xml><?xml version="1.0" encoding="utf-8"?>
 <p:sldMaster xmlns:a="http://schemas.openxmlformats.org/drawingml/2006/main" xmlns:r="http://schemas.openxmlformats.org/officeDocument/2006/relationships" xmlns:p="http://schemas.openxmlformats.org/presentationml/2006/main">
   <p:cSld>
+    <p:bg>
+      <p:bgRef idx="1001">
+        <a:schemeClr val="bg1"/>
+      </p:bgRef>
+    </p:bg>
     <p:spTree>
       <p:nvGrpSpPr>
         <p:cNvPr id="1" name=""/>
@@ -1927,6 +1661,7 @@
         <a:solidFill>
           <a:srgbClr val="241436"/>
         </a:solidFill>
+        <a:effectLst/>
       </p:bgPr>
     </p:bg>
     <p:spTree>
@@ -2008,7 +1743,7 @@
           <a:bodyPr wrap="square" lIns="0" tIns="0" rIns="0" bIns="0" rtlCol="0" anchor="ctr"/>
           <a:lstStyle/>
           <a:p>
-            <a:pPr indent="0" marL="0">
+            <a:pPr marL="0" indent="0">
               <a:buNone/>
             </a:pPr>
             <a:r>
@@ -2047,7 +1782,7 @@
           <a:bodyPr wrap="square" lIns="0" tIns="0" rIns="0" bIns="0" rtlCol="0" anchor="ctr"/>
           <a:lstStyle/>
           <a:p>
-            <a:pPr indent="0" marL="0">
+            <a:pPr marL="0" indent="0">
               <a:buNone/>
             </a:pPr>
             <a:r>
@@ -2086,7 +1821,7 @@
           <a:bodyPr wrap="square" lIns="0" tIns="0" rIns="0" bIns="0" rtlCol="0" anchor="ctr"/>
           <a:lstStyle/>
           <a:p>
-            <a:pPr indent="0" marL="0">
+            <a:pPr marL="0" indent="0">
               <a:buNone/>
             </a:pPr>
             <a:r>
@@ -2145,7 +1880,7 @@
           <a:bodyPr wrap="square" lIns="0" tIns="0" rIns="0" bIns="0" rtlCol="0" anchor="ctr"/>
           <a:lstStyle/>
           <a:p>
-            <a:pPr indent="0" marL="0">
+            <a:pPr marL="0" indent="0">
               <a:buNone/>
             </a:pPr>
             <a:r>
@@ -2162,7 +1897,7 @@
             <a:endParaRPr lang="en-US" sz="1400" dirty="0"/>
           </a:p>
           <a:p>
-            <a:pPr indent="0" marL="0">
+            <a:pPr marL="0" indent="0">
               <a:buNone/>
             </a:pPr>
             <a:r>
@@ -2174,7 +1909,7 @@
                 <a:ea typeface="Calibri" pitchFamily="34" charset="-122"/>
                 <a:cs typeface="Calibri" pitchFamily="34" charset="-120"/>
               </a:rPr>
-              <a:t>Intégrateur web — OpenClassrooms  •  10 juin 2026</a:t>
+              <a:t>Intégrateur web — OpenClassrooms  •  16 juin 2026</a:t>
             </a:r>
             <a:endParaRPr lang="en-US" sz="1400" dirty="0"/>
           </a:p>
@@ -2196,6 +1931,7 @@
         <a:solidFill>
           <a:srgbClr val="FFFFFF"/>
         </a:solidFill>
+        <a:effectLst/>
       </p:bgPr>
     </p:bg>
     <p:spTree>
@@ -2253,7 +1989,7 @@
           <a:bodyPr wrap="square" lIns="0" tIns="0" rIns="0" bIns="0" rtlCol="0" anchor="ctr"/>
           <a:lstStyle/>
           <a:p>
-            <a:pPr algn="ctr" indent="0" marL="0">
+            <a:pPr marL="0" indent="0" algn="ctr">
               <a:buNone/>
             </a:pPr>
             <a:r>
@@ -2292,7 +2028,7 @@
           <a:bodyPr wrap="square" lIns="0" tIns="0" rIns="0" bIns="0" rtlCol="0" anchor="ctr"/>
           <a:lstStyle/>
           <a:p>
-            <a:pPr indent="0" marL="0">
+            <a:pPr marL="0" indent="0">
               <a:buNone/>
             </a:pPr>
             <a:r>
@@ -2464,7 +2200,7 @@
           <a:bodyPr wrap="square" lIns="0" tIns="0" rIns="0" bIns="0" rtlCol="0" anchor="ctr"/>
           <a:lstStyle/>
           <a:p>
-            <a:pPr algn="ctr" indent="0" marL="0">
+            <a:pPr marL="0" indent="0" algn="ctr">
               <a:buNone/>
             </a:pPr>
             <a:r>
@@ -2523,7 +2259,7 @@
           <a:bodyPr wrap="square" lIns="0" tIns="0" rIns="0" bIns="0" rtlCol="0" anchor="ctr"/>
           <a:lstStyle/>
           <a:p>
-            <a:pPr algn="ctr" indent="0" marL="0">
+            <a:pPr marL="0" indent="0" algn="ctr">
               <a:buNone/>
             </a:pPr>
             <a:r>
@@ -2562,7 +2298,7 @@
           </a:solidFill>
           <a:ln/>
           <a:effectLst>
-            <a:outerShdw sx="100000" sy="100000" kx="0" ky="0" algn="bl" rotWithShape="0" blurRad="114300" dist="38100" dir="5400000">
+            <a:outerShdw blurRad="114300" dist="38100" dir="5400000" algn="bl" rotWithShape="0">
               <a:srgbClr val="000000">
                 <a:alpha val="22000"/>
               </a:srgbClr>
@@ -2591,7 +2327,7 @@
           <a:bodyPr wrap="square" lIns="0" tIns="0" rIns="0" bIns="0" rtlCol="0" anchor="t"/>
           <a:lstStyle/>
           <a:p>
-            <a:pPr algn="l" indent="0" marL="0">
+            <a:pPr marL="0" indent="0" algn="l">
               <a:lnSpc>
                 <a:spcPct val="118000"/>
               </a:lnSpc>
@@ -2611,7 +2347,7 @@
             <a:endParaRPr lang="en-US" sz="1150" dirty="0"/>
           </a:p>
           <a:p>
-            <a:pPr algn="l" indent="0" marL="0">
+            <a:pPr marL="0" indent="0" algn="l">
               <a:lnSpc>
                 <a:spcPct val="118000"/>
               </a:lnSpc>
@@ -2631,7 +2367,7 @@
             <a:endParaRPr lang="en-US" sz="1150" dirty="0"/>
           </a:p>
           <a:p>
-            <a:pPr algn="l" indent="0" marL="0">
+            <a:pPr marL="0" indent="0" algn="l">
               <a:lnSpc>
                 <a:spcPct val="118000"/>
               </a:lnSpc>
@@ -2651,7 +2387,7 @@
             <a:endParaRPr lang="en-US" sz="1150" dirty="0"/>
           </a:p>
           <a:p>
-            <a:pPr algn="l" indent="0" marL="0">
+            <a:pPr marL="0" indent="0" algn="l">
               <a:lnSpc>
                 <a:spcPct val="118000"/>
               </a:lnSpc>
@@ -2671,7 +2407,7 @@
             <a:endParaRPr lang="en-US" sz="1150" dirty="0"/>
           </a:p>
           <a:p>
-            <a:pPr algn="l" indent="0" marL="0">
+            <a:pPr marL="0" indent="0" algn="l">
               <a:lnSpc>
                 <a:spcPct val="118000"/>
               </a:lnSpc>
@@ -2691,7 +2427,7 @@
             <a:endParaRPr lang="en-US" sz="1150" dirty="0"/>
           </a:p>
           <a:p>
-            <a:pPr algn="l" indent="0" marL="0">
+            <a:pPr marL="0" indent="0" algn="l">
               <a:lnSpc>
                 <a:spcPct val="118000"/>
               </a:lnSpc>
@@ -2711,7 +2447,7 @@
             <a:endParaRPr lang="en-US" sz="1150" dirty="0"/>
           </a:p>
           <a:p>
-            <a:pPr algn="l" indent="0" marL="0">
+            <a:pPr marL="0" indent="0" algn="l">
               <a:lnSpc>
                 <a:spcPct val="118000"/>
               </a:lnSpc>
@@ -2731,7 +2467,7 @@
             <a:endParaRPr lang="en-US" sz="1150" dirty="0"/>
           </a:p>
           <a:p>
-            <a:pPr algn="l" indent="0" marL="0">
+            <a:pPr marL="0" indent="0" algn="l">
               <a:lnSpc>
                 <a:spcPct val="118000"/>
               </a:lnSpc>
@@ -2751,7 +2487,7 @@
             <a:endParaRPr lang="en-US" sz="1150" dirty="0"/>
           </a:p>
           <a:p>
-            <a:pPr algn="l" indent="0" marL="0">
+            <a:pPr marL="0" indent="0" algn="l">
               <a:lnSpc>
                 <a:spcPct val="118000"/>
               </a:lnSpc>
@@ -2793,7 +2529,7 @@
           <a:bodyPr wrap="square" lIns="0" tIns="0" rIns="0" bIns="0" rtlCol="0" anchor="ctr"/>
           <a:lstStyle/>
           <a:p>
-            <a:pPr algn="l" indent="0" marL="0">
+            <a:pPr marL="0" indent="0" algn="l">
               <a:buNone/>
             </a:pPr>
             <a:r>
@@ -2832,7 +2568,7 @@
           <a:bodyPr wrap="square" lIns="0" tIns="0" rIns="0" bIns="0" rtlCol="0" anchor="ctr"/>
           <a:lstStyle/>
           <a:p>
-            <a:pPr algn="r" indent="0" marL="0">
+            <a:pPr marL="0" indent="0" algn="r">
               <a:buNone/>
             </a:pPr>
             <a:r>
@@ -2866,6 +2602,7 @@
         <a:solidFill>
           <a:srgbClr val="FFFFFF"/>
         </a:solidFill>
+        <a:effectLst/>
       </p:bgPr>
     </p:bg>
     <p:spTree>
@@ -2923,7 +2660,7 @@
           <a:bodyPr wrap="square" lIns="0" tIns="0" rIns="0" bIns="0" rtlCol="0" anchor="ctr"/>
           <a:lstStyle/>
           <a:p>
-            <a:pPr algn="ctr" indent="0" marL="0">
+            <a:pPr marL="0" indent="0" algn="ctr">
               <a:buNone/>
             </a:pPr>
             <a:r>
@@ -2962,7 +2699,7 @@
           <a:bodyPr wrap="square" lIns="0" tIns="0" rIns="0" bIns="0" rtlCol="0" anchor="ctr"/>
           <a:lstStyle/>
           <a:p>
-            <a:pPr indent="0" marL="0">
+            <a:pPr marL="0" indent="0">
               <a:buNone/>
             </a:pPr>
             <a:r>
@@ -3132,7 +2869,7 @@
           <a:bodyPr wrap="square" lIns="101600" tIns="101600" rIns="101600" bIns="101600" rtlCol="0" anchor="ctr"/>
           <a:lstStyle/>
           <a:p>
-            <a:pPr algn="l" indent="0" marL="0">
+            <a:pPr marL="0" indent="0" algn="l">
               <a:buNone/>
             </a:pPr>
             <a:r>
@@ -3191,7 +2928,7 @@
           <a:bodyPr wrap="square" lIns="0" tIns="0" rIns="0" bIns="0" rtlCol="0" anchor="ctr"/>
           <a:lstStyle/>
           <a:p>
-            <a:pPr algn="ctr" indent="0" marL="0">
+            <a:pPr marL="0" indent="0" algn="ctr">
               <a:buNone/>
             </a:pPr>
             <a:r>
@@ -3208,7 +2945,7 @@
             <a:endParaRPr lang="en-US" sz="1000" dirty="0"/>
           </a:p>
           <a:p>
-            <a:pPr algn="ctr" indent="0" marL="0">
+            <a:pPr marL="0" indent="0" algn="ctr">
               <a:buNone/>
             </a:pPr>
             <a:r>
@@ -3272,7 +3009,7 @@
           <a:bodyPr wrap="square" lIns="0" tIns="0" rIns="0" bIns="0" rtlCol="0" anchor="ctr"/>
           <a:lstStyle/>
           <a:p>
-            <a:pPr algn="ctr" indent="0" marL="0">
+            <a:pPr marL="0" indent="0" algn="ctr">
               <a:buNone/>
             </a:pPr>
             <a:r>
@@ -3311,7 +3048,7 @@
           </a:solidFill>
           <a:ln/>
           <a:effectLst>
-            <a:outerShdw sx="100000" sy="100000" kx="0" ky="0" algn="bl" rotWithShape="0" blurRad="114300" dist="38100" dir="5400000">
+            <a:outerShdw blurRad="114300" dist="38100" dir="5400000" algn="bl" rotWithShape="0">
               <a:srgbClr val="000000">
                 <a:alpha val="22000"/>
               </a:srgbClr>
@@ -3340,7 +3077,7 @@
           <a:bodyPr wrap="square" lIns="0" tIns="0" rIns="0" bIns="0" rtlCol="0" anchor="t"/>
           <a:lstStyle/>
           <a:p>
-            <a:pPr algn="l" indent="0" marL="0">
+            <a:pPr marL="0" indent="0" algn="l">
               <a:lnSpc>
                 <a:spcPct val="118000"/>
               </a:lnSpc>
@@ -3360,7 +3097,7 @@
             <a:endParaRPr lang="en-US" sz="1150" dirty="0"/>
           </a:p>
           <a:p>
-            <a:pPr algn="l" indent="0" marL="0">
+            <a:pPr marL="0" indent="0" algn="l">
               <a:lnSpc>
                 <a:spcPct val="118000"/>
               </a:lnSpc>
@@ -3380,7 +3117,7 @@
             <a:endParaRPr lang="en-US" sz="1150" dirty="0"/>
           </a:p>
           <a:p>
-            <a:pPr algn="l" indent="0" marL="0">
+            <a:pPr marL="0" indent="0" algn="l">
               <a:lnSpc>
                 <a:spcPct val="118000"/>
               </a:lnSpc>
@@ -3400,7 +3137,7 @@
             <a:endParaRPr lang="en-US" sz="1150" dirty="0"/>
           </a:p>
           <a:p>
-            <a:pPr algn="l" indent="0" marL="0">
+            <a:pPr marL="0" indent="0" algn="l">
               <a:lnSpc>
                 <a:spcPct val="118000"/>
               </a:lnSpc>
@@ -3420,7 +3157,7 @@
             <a:endParaRPr lang="en-US" sz="1150" dirty="0"/>
           </a:p>
           <a:p>
-            <a:pPr algn="l" indent="0" marL="0">
+            <a:pPr marL="0" indent="0" algn="l">
               <a:lnSpc>
                 <a:spcPct val="118000"/>
               </a:lnSpc>
@@ -3440,7 +3177,7 @@
             <a:endParaRPr lang="en-US" sz="1150" dirty="0"/>
           </a:p>
           <a:p>
-            <a:pPr algn="l" indent="0" marL="0">
+            <a:pPr marL="0" indent="0" algn="l">
               <a:lnSpc>
                 <a:spcPct val="118000"/>
               </a:lnSpc>
@@ -3460,7 +3197,7 @@
             <a:endParaRPr lang="en-US" sz="1150" dirty="0"/>
           </a:p>
           <a:p>
-            <a:pPr algn="l" indent="0" marL="0">
+            <a:pPr marL="0" indent="0" algn="l">
               <a:lnSpc>
                 <a:spcPct val="118000"/>
               </a:lnSpc>
@@ -3480,7 +3217,7 @@
             <a:endParaRPr lang="en-US" sz="1150" dirty="0"/>
           </a:p>
           <a:p>
-            <a:pPr algn="l" indent="0" marL="0">
+            <a:pPr marL="0" indent="0" algn="l">
               <a:lnSpc>
                 <a:spcPct val="118000"/>
               </a:lnSpc>
@@ -3500,7 +3237,7 @@
             <a:endParaRPr lang="en-US" sz="1150" dirty="0"/>
           </a:p>
           <a:p>
-            <a:pPr algn="l" indent="0" marL="0">
+            <a:pPr marL="0" indent="0" algn="l">
               <a:lnSpc>
                 <a:spcPct val="118000"/>
               </a:lnSpc>
@@ -3542,7 +3279,7 @@
           <a:bodyPr wrap="square" lIns="0" tIns="0" rIns="0" bIns="0" rtlCol="0" anchor="ctr"/>
           <a:lstStyle/>
           <a:p>
-            <a:pPr algn="l" indent="0" marL="0">
+            <a:pPr marL="0" indent="0" algn="l">
               <a:buNone/>
             </a:pPr>
             <a:r>
@@ -3581,7 +3318,7 @@
           <a:bodyPr wrap="square" lIns="0" tIns="0" rIns="0" bIns="0" rtlCol="0" anchor="ctr"/>
           <a:lstStyle/>
           <a:p>
-            <a:pPr algn="r" indent="0" marL="0">
+            <a:pPr marL="0" indent="0" algn="r">
               <a:buNone/>
             </a:pPr>
             <a:r>
@@ -3615,6 +3352,7 @@
         <a:solidFill>
           <a:srgbClr val="FFFFFF"/>
         </a:solidFill>
+        <a:effectLst/>
       </p:bgPr>
     </p:bg>
     <p:spTree>
@@ -3672,7 +3410,7 @@
           <a:bodyPr wrap="square" lIns="0" tIns="0" rIns="0" bIns="0" rtlCol="0" anchor="ctr"/>
           <a:lstStyle/>
           <a:p>
-            <a:pPr algn="ctr" indent="0" marL="0">
+            <a:pPr marL="0" indent="0" algn="ctr">
               <a:buNone/>
             </a:pPr>
             <a:r>
@@ -3711,7 +3449,7 @@
           <a:bodyPr wrap="square" lIns="0" tIns="0" rIns="0" bIns="0" rtlCol="0" anchor="ctr"/>
           <a:lstStyle/>
           <a:p>
-            <a:pPr indent="0" marL="0">
+            <a:pPr marL="0" indent="0">
               <a:buNone/>
             </a:pPr>
             <a:r>
@@ -3898,7 +3636,7 @@
           </a:solidFill>
           <a:ln/>
           <a:effectLst>
-            <a:outerShdw sx="100000" sy="100000" kx="0" ky="0" algn="bl" rotWithShape="0" blurRad="114300" dist="38100" dir="5400000">
+            <a:outerShdw blurRad="114300" dist="38100" dir="5400000" algn="bl" rotWithShape="0">
               <a:srgbClr val="000000">
                 <a:alpha val="22000"/>
               </a:srgbClr>
@@ -3927,7 +3665,7 @@
           <a:bodyPr wrap="square" lIns="0" tIns="0" rIns="0" bIns="0" rtlCol="0" anchor="t"/>
           <a:lstStyle/>
           <a:p>
-            <a:pPr algn="l" indent="0" marL="0">
+            <a:pPr marL="0" indent="0" algn="l">
               <a:lnSpc>
                 <a:spcPct val="118000"/>
               </a:lnSpc>
@@ -3947,7 +3685,7 @@
             <a:endParaRPr lang="en-US" sz="1150" dirty="0"/>
           </a:p>
           <a:p>
-            <a:pPr algn="l" indent="0" marL="0">
+            <a:pPr marL="0" indent="0" algn="l">
               <a:lnSpc>
                 <a:spcPct val="118000"/>
               </a:lnSpc>
@@ -3967,7 +3705,7 @@
             <a:endParaRPr lang="en-US" sz="1150" dirty="0"/>
           </a:p>
           <a:p>
-            <a:pPr algn="l" indent="0" marL="0">
+            <a:pPr marL="0" indent="0" algn="l">
               <a:lnSpc>
                 <a:spcPct val="118000"/>
               </a:lnSpc>
@@ -3987,7 +3725,7 @@
             <a:endParaRPr lang="en-US" sz="1150" dirty="0"/>
           </a:p>
           <a:p>
-            <a:pPr algn="l" indent="0" marL="0">
+            <a:pPr marL="0" indent="0" algn="l">
               <a:lnSpc>
                 <a:spcPct val="118000"/>
               </a:lnSpc>
@@ -4007,7 +3745,7 @@
             <a:endParaRPr lang="en-US" sz="1150" dirty="0"/>
           </a:p>
           <a:p>
-            <a:pPr algn="l" indent="0" marL="0">
+            <a:pPr marL="0" indent="0" algn="l">
               <a:lnSpc>
                 <a:spcPct val="118000"/>
               </a:lnSpc>
@@ -4027,7 +3765,7 @@
             <a:endParaRPr lang="en-US" sz="1150" dirty="0"/>
           </a:p>
           <a:p>
-            <a:pPr algn="l" indent="0" marL="0">
+            <a:pPr marL="0" indent="0" algn="l">
               <a:lnSpc>
                 <a:spcPct val="118000"/>
               </a:lnSpc>
@@ -4047,7 +3785,7 @@
             <a:endParaRPr lang="en-US" sz="1150" dirty="0"/>
           </a:p>
           <a:p>
-            <a:pPr algn="l" indent="0" marL="0">
+            <a:pPr marL="0" indent="0" algn="l">
               <a:lnSpc>
                 <a:spcPct val="118000"/>
               </a:lnSpc>
@@ -4067,7 +3805,7 @@
             <a:endParaRPr lang="en-US" sz="1150" dirty="0"/>
           </a:p>
           <a:p>
-            <a:pPr algn="l" indent="0" marL="0">
+            <a:pPr marL="0" indent="0" algn="l">
               <a:lnSpc>
                 <a:spcPct val="118000"/>
               </a:lnSpc>
@@ -4087,7 +3825,7 @@
             <a:endParaRPr lang="en-US" sz="1150" dirty="0"/>
           </a:p>
           <a:p>
-            <a:pPr algn="l" indent="0" marL="0">
+            <a:pPr marL="0" indent="0" algn="l">
               <a:lnSpc>
                 <a:spcPct val="118000"/>
               </a:lnSpc>
@@ -4107,7 +3845,7 @@
             <a:endParaRPr lang="en-US" sz="1150" dirty="0"/>
           </a:p>
           <a:p>
-            <a:pPr algn="l" indent="0" marL="0">
+            <a:pPr marL="0" indent="0" algn="l">
               <a:lnSpc>
                 <a:spcPct val="118000"/>
               </a:lnSpc>
@@ -4127,7 +3865,7 @@
             <a:endParaRPr lang="en-US" sz="1150" dirty="0"/>
           </a:p>
           <a:p>
-            <a:pPr algn="l" indent="0" marL="0">
+            <a:pPr marL="0" indent="0" algn="l">
               <a:lnSpc>
                 <a:spcPct val="118000"/>
               </a:lnSpc>
@@ -4147,7 +3885,7 @@
             <a:endParaRPr lang="en-US" sz="1150" dirty="0"/>
           </a:p>
           <a:p>
-            <a:pPr algn="l" indent="0" marL="0">
+            <a:pPr marL="0" indent="0" algn="l">
               <a:lnSpc>
                 <a:spcPct val="118000"/>
               </a:lnSpc>
@@ -4167,7 +3905,7 @@
             <a:endParaRPr lang="en-US" sz="1150" dirty="0"/>
           </a:p>
           <a:p>
-            <a:pPr algn="l" indent="0" marL="0">
+            <a:pPr marL="0" indent="0" algn="l">
               <a:lnSpc>
                 <a:spcPct val="118000"/>
               </a:lnSpc>
@@ -4187,7 +3925,7 @@
             <a:endParaRPr lang="en-US" sz="1150" dirty="0"/>
           </a:p>
           <a:p>
-            <a:pPr algn="l" indent="0" marL="0">
+            <a:pPr marL="0" indent="0" algn="l">
               <a:lnSpc>
                 <a:spcPct val="118000"/>
               </a:lnSpc>
@@ -4207,7 +3945,7 @@
             <a:endParaRPr lang="en-US" sz="1150" dirty="0"/>
           </a:p>
           <a:p>
-            <a:pPr algn="l" indent="0" marL="0">
+            <a:pPr marL="0" indent="0" algn="l">
               <a:lnSpc>
                 <a:spcPct val="118000"/>
               </a:lnSpc>
@@ -4249,7 +3987,7 @@
           <a:bodyPr wrap="square" lIns="0" tIns="0" rIns="0" bIns="0" rtlCol="0" anchor="ctr"/>
           <a:lstStyle/>
           <a:p>
-            <a:pPr algn="l" indent="0" marL="0">
+            <a:pPr marL="0" indent="0" algn="l">
               <a:buNone/>
             </a:pPr>
             <a:r>
@@ -4288,7 +4026,7 @@
           <a:bodyPr wrap="square" lIns="0" tIns="0" rIns="0" bIns="0" rtlCol="0" anchor="ctr"/>
           <a:lstStyle/>
           <a:p>
-            <a:pPr algn="r" indent="0" marL="0">
+            <a:pPr marL="0" indent="0" algn="r">
               <a:buNone/>
             </a:pPr>
             <a:r>
@@ -4322,6 +4060,7 @@
         <a:solidFill>
           <a:srgbClr val="241436"/>
         </a:solidFill>
+        <a:effectLst/>
       </p:bgPr>
     </p:bg>
     <p:spTree>
@@ -4403,7 +4142,7 @@
           <a:bodyPr wrap="square" lIns="0" tIns="0" rIns="0" bIns="0" rtlCol="0" anchor="ctr"/>
           <a:lstStyle/>
           <a:p>
-            <a:pPr indent="0" marL="0">
+            <a:pPr marL="0" indent="0">
               <a:buNone/>
             </a:pPr>
             <a:r>
@@ -4545,7 +4284,7 @@
           <a:bodyPr wrap="square" lIns="0" tIns="0" rIns="0" bIns="0" rtlCol="0" anchor="ctr"/>
           <a:lstStyle/>
           <a:p>
-            <a:pPr indent="0" marL="0">
+            <a:pPr marL="0" indent="0">
               <a:buNone/>
             </a:pPr>
             <a:r>
@@ -4579,6 +4318,7 @@
         <a:solidFill>
           <a:srgbClr val="FFFFFF"/>
         </a:solidFill>
+        <a:effectLst/>
       </p:bgPr>
     </p:bg>
     <p:spTree>
@@ -4616,7 +4356,7 @@
           <a:bodyPr wrap="square" lIns="0" tIns="0" rIns="0" bIns="0" rtlCol="0" anchor="ctr"/>
           <a:lstStyle/>
           <a:p>
-            <a:pPr indent="0" marL="0">
+            <a:pPr marL="0" indent="0">
               <a:buNone/>
             </a:pPr>
             <a:r>
@@ -4655,7 +4395,7 @@
           </a:solidFill>
           <a:ln/>
           <a:effectLst>
-            <a:outerShdw sx="100000" sy="100000" kx="0" ky="0" algn="bl" rotWithShape="0" blurRad="88900" dist="25400" dir="5400000">
+            <a:outerShdw blurRad="88900" dist="25400" dir="5400000" algn="bl" rotWithShape="0">
               <a:srgbClr val="000000">
                 <a:alpha val="12000"/>
               </a:srgbClr>
@@ -4704,7 +4444,7 @@
           <a:bodyPr wrap="square" lIns="0" tIns="0" rIns="0" bIns="0" rtlCol="0" anchor="t"/>
           <a:lstStyle/>
           <a:p>
-            <a:pPr indent="0" marL="0">
+            <a:pPr marL="0" indent="0">
               <a:buNone/>
             </a:pPr>
             <a:r>
@@ -4807,7 +4547,7 @@
           </a:solidFill>
           <a:ln/>
           <a:effectLst>
-            <a:outerShdw sx="100000" sy="100000" kx="0" ky="0" algn="bl" rotWithShape="0" blurRad="88900" dist="25400" dir="5400000">
+            <a:outerShdw blurRad="88900" dist="25400" dir="5400000" algn="bl" rotWithShape="0">
               <a:srgbClr val="000000">
                 <a:alpha val="12000"/>
               </a:srgbClr>
@@ -4856,7 +4596,7 @@
           <a:bodyPr wrap="square" lIns="0" tIns="0" rIns="0" bIns="0" rtlCol="0" anchor="t"/>
           <a:lstStyle/>
           <a:p>
-            <a:pPr indent="0" marL="0">
+            <a:pPr marL="0" indent="0">
               <a:buNone/>
             </a:pPr>
             <a:r>
@@ -4980,7 +4720,7 @@
           </a:solidFill>
           <a:ln/>
           <a:effectLst>
-            <a:outerShdw sx="100000" sy="100000" kx="0" ky="0" algn="bl" rotWithShape="0" blurRad="88900" dist="25400" dir="5400000">
+            <a:outerShdw blurRad="88900" dist="25400" dir="5400000" algn="bl" rotWithShape="0">
               <a:srgbClr val="000000">
                 <a:alpha val="12000"/>
               </a:srgbClr>
@@ -5029,7 +4769,7 @@
           <a:bodyPr wrap="square" lIns="0" tIns="0" rIns="0" bIns="0" rtlCol="0" anchor="t"/>
           <a:lstStyle/>
           <a:p>
-            <a:pPr indent="0" marL="0">
+            <a:pPr marL="0" indent="0">
               <a:buNone/>
             </a:pPr>
             <a:r>
@@ -5168,45 +4908,56 @@
                 <a:ea typeface="Calibri" pitchFamily="34" charset="-122"/>
                 <a:cs typeface="Calibri" pitchFamily="34" charset="-120"/>
               </a:rPr>
-              <a:t>Cartes cliquables (stretched link)</a:t>
-            </a:r>
-            <a:endParaRPr lang="en-US" sz="1250" dirty="0"/>
-          </a:p>
-        </p:txBody>
-      </p:sp>
-      <p:sp>
-        <p:nvSpPr>
-          <p:cNvPr id="15" name="Text 13"/>
-          <p:cNvSpPr/>
-          <p:nvPr/>
-        </p:nvSpPr>
-        <p:spPr>
-          <a:xfrm>
-            <a:off x="548640" y="4800600"/>
-            <a:ext cx="4572000" cy="274320"/>
-          </a:xfrm>
-          <a:prstGeom prst="rect">
-            <a:avLst/>
-          </a:prstGeom>
-          <a:noFill/>
-          <a:ln/>
-        </p:spPr>
-        <p:txBody>
-          <a:bodyPr wrap="square" lIns="0" tIns="0" rIns="0" bIns="0" rtlCol="0" anchor="ctr"/>
-          <a:lstStyle/>
-          <a:p>
-            <a:pPr algn="l" indent="0" marL="0">
-              <a:buNone/>
-            </a:pPr>
-            <a:r>
-              <a:rPr lang="en-US" sz="900" dirty="0">
-                <a:solidFill>
-                  <a:srgbClr val="8A8A8A"/>
+              <a:t>Cartes </a:t>
+            </a:r>
+            <a:r>
+              <a:rPr lang="en-US" sz="1250" dirty="0" err="1">
+                <a:solidFill>
+                  <a:srgbClr val="353535"/>
                 </a:solidFill>
                 <a:latin typeface="Calibri" pitchFamily="34" charset="0"/>
                 <a:ea typeface="Calibri" pitchFamily="34" charset="-122"/>
                 <a:cs typeface="Calibri" pitchFamily="34" charset="-120"/>
               </a:rPr>
+              <a:t>cliquables</a:t>
+            </a:r>
+            <a:endParaRPr lang="en-US" sz="1250" dirty="0"/>
+          </a:p>
+        </p:txBody>
+      </p:sp>
+      <p:sp>
+        <p:nvSpPr>
+          <p:cNvPr id="15" name="Text 13"/>
+          <p:cNvSpPr/>
+          <p:nvPr/>
+        </p:nvSpPr>
+        <p:spPr>
+          <a:xfrm>
+            <a:off x="548640" y="4800600"/>
+            <a:ext cx="4572000" cy="274320"/>
+          </a:xfrm>
+          <a:prstGeom prst="rect">
+            <a:avLst/>
+          </a:prstGeom>
+          <a:noFill/>
+          <a:ln/>
+        </p:spPr>
+        <p:txBody>
+          <a:bodyPr wrap="square" lIns="0" tIns="0" rIns="0" bIns="0" rtlCol="0" anchor="ctr"/>
+          <a:lstStyle/>
+          <a:p>
+            <a:pPr marL="0" indent="0" algn="l">
+              <a:buNone/>
+            </a:pPr>
+            <a:r>
+              <a:rPr lang="en-US" sz="900" dirty="0">
+                <a:solidFill>
+                  <a:srgbClr val="8A8A8A"/>
+                </a:solidFill>
+                <a:latin typeface="Calibri" pitchFamily="34" charset="0"/>
+                <a:ea typeface="Calibri" pitchFamily="34" charset="-122"/>
+                <a:cs typeface="Calibri" pitchFamily="34" charset="-120"/>
+              </a:rPr>
               <a:t>ohmyfood — Soutenance Projet 4</a:t>
             </a:r>
             <a:endParaRPr lang="en-US" sz="900" dirty="0"/>
@@ -5234,7 +4985,7 @@
           <a:bodyPr wrap="square" lIns="0" tIns="0" rIns="0" bIns="0" rtlCol="0" anchor="ctr"/>
           <a:lstStyle/>
           <a:p>
-            <a:pPr algn="r" indent="0" marL="0">
+            <a:pPr marL="0" indent="0" algn="r">
               <a:buNone/>
             </a:pPr>
             <a:r>
@@ -5268,6 +5019,7 @@
         <a:solidFill>
           <a:srgbClr val="FFFFFF"/>
         </a:solidFill>
+        <a:effectLst/>
       </p:bgPr>
     </p:bg>
     <p:spTree>
@@ -5325,7 +5077,7 @@
           <a:bodyPr wrap="square" lIns="0" tIns="0" rIns="0" bIns="0" rtlCol="0" anchor="ctr"/>
           <a:lstStyle/>
           <a:p>
-            <a:pPr algn="ctr" indent="0" marL="0">
+            <a:pPr marL="0" indent="0" algn="ctr">
               <a:buNone/>
             </a:pPr>
             <a:r>
@@ -5364,7 +5116,7 @@
           <a:bodyPr wrap="square" lIns="0" tIns="0" rIns="0" bIns="0" rtlCol="0" anchor="ctr"/>
           <a:lstStyle/>
           <a:p>
-            <a:pPr indent="0" marL="0">
+            <a:pPr marL="0" indent="0">
               <a:buNone/>
             </a:pPr>
             <a:r>
@@ -5445,7 +5197,7 @@
             <a:endParaRPr lang="en-US" sz="1450" dirty="0"/>
           </a:p>
           <a:p>
-            <a:pPr lvl="1" marL="355600" indent="-177800">
+            <a:pPr marL="355600" lvl="1" indent="-177800">
               <a:spcAft>
                 <a:spcPts val="400"/>
               </a:spcAft>
@@ -5466,7 +5218,7 @@
             <a:endParaRPr lang="en-US" sz="1450" dirty="0"/>
           </a:p>
           <a:p>
-            <a:pPr lvl="1" marL="355600" indent="-177800">
+            <a:pPr marL="355600" lvl="1" indent="-177800">
               <a:spcAft>
                 <a:spcPts val="400"/>
               </a:spcAft>
@@ -5524,7 +5276,7 @@
                 <a:ea typeface="Calibri" pitchFamily="34" charset="-122"/>
                 <a:cs typeface="Calibri" pitchFamily="34" charset="-120"/>
               </a:rPr>
-              <a:t>Importés avec @use (et non @import, déprécié).</a:t>
+              <a:t>Importés avec @use.</a:t>
             </a:r>
             <a:endParaRPr lang="en-US" sz="1450" dirty="0"/>
           </a:p>
@@ -5551,7 +5303,7 @@
           </a:solidFill>
           <a:ln/>
           <a:effectLst>
-            <a:outerShdw sx="100000" sy="100000" kx="0" ky="0" algn="bl" rotWithShape="0" blurRad="114300" dist="38100" dir="5400000">
+            <a:outerShdw blurRad="114300" dist="38100" dir="5400000" algn="bl" rotWithShape="0">
               <a:srgbClr val="000000">
                 <a:alpha val="22000"/>
               </a:srgbClr>
@@ -5580,7 +5332,7 @@
           <a:bodyPr wrap="square" lIns="0" tIns="0" rIns="0" bIns="0" rtlCol="0" anchor="t"/>
           <a:lstStyle/>
           <a:p>
-            <a:pPr algn="l" indent="0" marL="0">
+            <a:pPr marL="0" indent="0" algn="l">
               <a:lnSpc>
                 <a:spcPct val="118000"/>
               </a:lnSpc>
@@ -5600,7 +5352,7 @@
             <a:endParaRPr lang="en-US" sz="1150" dirty="0"/>
           </a:p>
           <a:p>
-            <a:pPr algn="l" indent="0" marL="0">
+            <a:pPr marL="0" indent="0" algn="l">
               <a:lnSpc>
                 <a:spcPct val="118000"/>
               </a:lnSpc>
@@ -5620,7 +5372,7 @@
             <a:endParaRPr lang="en-US" sz="1150" dirty="0"/>
           </a:p>
           <a:p>
-            <a:pPr algn="l" indent="0" marL="0">
+            <a:pPr marL="0" indent="0" algn="l">
               <a:lnSpc>
                 <a:spcPct val="118000"/>
               </a:lnSpc>
@@ -5640,7 +5392,7 @@
             <a:endParaRPr lang="en-US" sz="1150" dirty="0"/>
           </a:p>
           <a:p>
-            <a:pPr algn="l" indent="0" marL="0">
+            <a:pPr marL="0" indent="0" algn="l">
               <a:lnSpc>
                 <a:spcPct val="118000"/>
               </a:lnSpc>
@@ -5660,7 +5412,7 @@
             <a:endParaRPr lang="en-US" sz="1150" dirty="0"/>
           </a:p>
           <a:p>
-            <a:pPr algn="l" indent="0" marL="0">
+            <a:pPr marL="0" indent="0" algn="l">
               <a:lnSpc>
                 <a:spcPct val="118000"/>
               </a:lnSpc>
@@ -5680,7 +5432,7 @@
             <a:endParaRPr lang="en-US" sz="1150" dirty="0"/>
           </a:p>
           <a:p>
-            <a:pPr algn="l" indent="0" marL="0">
+            <a:pPr marL="0" indent="0" algn="l">
               <a:lnSpc>
                 <a:spcPct val="118000"/>
               </a:lnSpc>
@@ -5700,7 +5452,7 @@
             <a:endParaRPr lang="en-US" sz="1150" dirty="0"/>
           </a:p>
           <a:p>
-            <a:pPr algn="l" indent="0" marL="0">
+            <a:pPr marL="0" indent="0" algn="l">
               <a:lnSpc>
                 <a:spcPct val="118000"/>
               </a:lnSpc>
@@ -5720,7 +5472,7 @@
             <a:endParaRPr lang="en-US" sz="1150" dirty="0"/>
           </a:p>
           <a:p>
-            <a:pPr algn="l" indent="0" marL="0">
+            <a:pPr marL="0" indent="0" algn="l">
               <a:lnSpc>
                 <a:spcPct val="118000"/>
               </a:lnSpc>
@@ -5740,7 +5492,7 @@
             <a:endParaRPr lang="en-US" sz="1150" dirty="0"/>
           </a:p>
           <a:p>
-            <a:pPr algn="l" indent="0" marL="0">
+            <a:pPr marL="0" indent="0" algn="l">
               <a:lnSpc>
                 <a:spcPct val="118000"/>
               </a:lnSpc>
@@ -5760,7 +5512,7 @@
             <a:endParaRPr lang="en-US" sz="1150" dirty="0"/>
           </a:p>
           <a:p>
-            <a:pPr algn="l" indent="0" marL="0">
+            <a:pPr marL="0" indent="0" algn="l">
               <a:lnSpc>
                 <a:spcPct val="118000"/>
               </a:lnSpc>
@@ -5780,7 +5532,7 @@
             <a:endParaRPr lang="en-US" sz="1150" dirty="0"/>
           </a:p>
           <a:p>
-            <a:pPr algn="l" indent="0" marL="0">
+            <a:pPr marL="0" indent="0" algn="l">
               <a:lnSpc>
                 <a:spcPct val="118000"/>
               </a:lnSpc>
@@ -5800,7 +5552,7 @@
             <a:endParaRPr lang="en-US" sz="1150" dirty="0"/>
           </a:p>
           <a:p>
-            <a:pPr algn="l" indent="0" marL="0">
+            <a:pPr marL="0" indent="0" algn="l">
               <a:lnSpc>
                 <a:spcPct val="118000"/>
               </a:lnSpc>
@@ -5842,7 +5594,7 @@
           <a:bodyPr wrap="square" lIns="0" tIns="0" rIns="0" bIns="0" rtlCol="0" anchor="ctr"/>
           <a:lstStyle/>
           <a:p>
-            <a:pPr indent="0" marL="0">
+            <a:pPr marL="0" indent="0">
               <a:buNone/>
             </a:pPr>
             <a:r>
@@ -5881,7 +5633,7 @@
           <a:bodyPr wrap="square" lIns="0" tIns="0" rIns="0" bIns="0" rtlCol="0" anchor="ctr"/>
           <a:lstStyle/>
           <a:p>
-            <a:pPr algn="l" indent="0" marL="0">
+            <a:pPr marL="0" indent="0" algn="l">
               <a:buNone/>
             </a:pPr>
             <a:r>
@@ -5920,7 +5672,7 @@
           <a:bodyPr wrap="square" lIns="0" tIns="0" rIns="0" bIns="0" rtlCol="0" anchor="ctr"/>
           <a:lstStyle/>
           <a:p>
-            <a:pPr algn="r" indent="0" marL="0">
+            <a:pPr marL="0" indent="0" algn="r">
               <a:buNone/>
             </a:pPr>
             <a:r>
@@ -5954,6 +5706,7 @@
         <a:solidFill>
           <a:srgbClr val="FFFFFF"/>
         </a:solidFill>
+        <a:effectLst/>
       </p:bgPr>
     </p:bg>
     <p:spTree>
@@ -6011,7 +5764,7 @@
           <a:bodyPr wrap="square" lIns="0" tIns="0" rIns="0" bIns="0" rtlCol="0" anchor="ctr"/>
           <a:lstStyle/>
           <a:p>
-            <a:pPr algn="ctr" indent="0" marL="0">
+            <a:pPr marL="0" indent="0" algn="ctr">
               <a:buNone/>
             </a:pPr>
             <a:r>
@@ -6050,7 +5803,7 @@
           <a:bodyPr wrap="square" lIns="0" tIns="0" rIns="0" bIns="0" rtlCol="0" anchor="ctr"/>
           <a:lstStyle/>
           <a:p>
-            <a:pPr indent="0" marL="0">
+            <a:pPr marL="0" indent="0">
               <a:buNone/>
             </a:pPr>
             <a:r>
@@ -6168,28 +5921,18 @@
                 <a:ea typeface="Calibri" pitchFamily="34" charset="-122"/>
                 <a:cs typeface="Calibri" pitchFamily="34" charset="-120"/>
               </a:rPr>
-              <a:t>Un mixin par palier → media queries factorisées.</a:t>
-            </a:r>
-            <a:endParaRPr lang="en-US" sz="1450" dirty="0"/>
-          </a:p>
-          <a:p>
-            <a:pPr marL="228600" indent="-228600">
-              <a:spcAft>
-                <a:spcPts val="900"/>
-              </a:spcAft>
-              <a:buSzPct val="100000"/>
-              <a:buChar char="•"/>
-            </a:pPr>
-            <a:r>
-              <a:rPr lang="en-US" sz="1450" dirty="0">
-                <a:solidFill>
-                  <a:srgbClr val="9356DC"/>
+              <a:t>Un mixin par </a:t>
+            </a:r>
+            <a:r>
+              <a:rPr lang="en-US" sz="1450" dirty="0" err="1">
+                <a:solidFill>
+                  <a:srgbClr val="353535"/>
                 </a:solidFill>
                 <a:latin typeface="Calibri" pitchFamily="34" charset="0"/>
                 <a:ea typeface="Calibri" pitchFamily="34" charset="-122"/>
                 <a:cs typeface="Calibri" pitchFamily="34" charset="-120"/>
               </a:rPr>
-              <a:t>Plus de cohérence, moins de répétition.</a:t>
+              <a:t>palier</a:t>
             </a:r>
             <a:endParaRPr lang="en-US" sz="1450" dirty="0"/>
           </a:p>
@@ -6216,7 +5959,7 @@
           </a:solidFill>
           <a:ln/>
           <a:effectLst>
-            <a:outerShdw sx="100000" sy="100000" kx="0" ky="0" algn="bl" rotWithShape="0" blurRad="114300" dist="38100" dir="5400000">
+            <a:outerShdw blurRad="114300" dist="38100" dir="5400000" algn="bl" rotWithShape="0">
               <a:srgbClr val="000000">
                 <a:alpha val="22000"/>
               </a:srgbClr>
@@ -6245,7 +5988,7 @@
           <a:bodyPr wrap="square" lIns="0" tIns="0" rIns="0" bIns="0" rtlCol="0" anchor="t"/>
           <a:lstStyle/>
           <a:p>
-            <a:pPr algn="l" indent="0" marL="0">
+            <a:pPr marL="0" indent="0" algn="l">
               <a:lnSpc>
                 <a:spcPct val="118000"/>
               </a:lnSpc>
@@ -6265,7 +6008,7 @@
             <a:endParaRPr lang="en-US" sz="1150" dirty="0"/>
           </a:p>
           <a:p>
-            <a:pPr algn="l" indent="0" marL="0">
+            <a:pPr marL="0" indent="0" algn="l">
               <a:lnSpc>
                 <a:spcPct val="118000"/>
               </a:lnSpc>
@@ -6285,7 +6028,7 @@
             <a:endParaRPr lang="en-US" sz="1150" dirty="0"/>
           </a:p>
           <a:p>
-            <a:pPr algn="l" indent="0" marL="0">
+            <a:pPr marL="0" indent="0" algn="l">
               <a:lnSpc>
                 <a:spcPct val="118000"/>
               </a:lnSpc>
@@ -6305,7 +6048,7 @@
             <a:endParaRPr lang="en-US" sz="1150" dirty="0"/>
           </a:p>
           <a:p>
-            <a:pPr algn="l" indent="0" marL="0">
+            <a:pPr marL="0" indent="0" algn="l">
               <a:lnSpc>
                 <a:spcPct val="118000"/>
               </a:lnSpc>
@@ -6325,7 +6068,7 @@
             <a:endParaRPr lang="en-US" sz="1150" dirty="0"/>
           </a:p>
           <a:p>
-            <a:pPr algn="l" indent="0" marL="0">
+            <a:pPr marL="0" indent="0" algn="l">
               <a:lnSpc>
                 <a:spcPct val="118000"/>
               </a:lnSpc>
@@ -6345,7 +6088,7 @@
             <a:endParaRPr lang="en-US" sz="1150" dirty="0"/>
           </a:p>
           <a:p>
-            <a:pPr algn="l" indent="0" marL="0">
+            <a:pPr marL="0" indent="0" algn="l">
               <a:lnSpc>
                 <a:spcPct val="118000"/>
               </a:lnSpc>
@@ -6365,7 +6108,7 @@
             <a:endParaRPr lang="en-US" sz="1150" dirty="0"/>
           </a:p>
           <a:p>
-            <a:pPr algn="l" indent="0" marL="0">
+            <a:pPr marL="0" indent="0" algn="l">
               <a:lnSpc>
                 <a:spcPct val="118000"/>
               </a:lnSpc>
@@ -6385,7 +6128,7 @@
             <a:endParaRPr lang="en-US" sz="1150" dirty="0"/>
           </a:p>
           <a:p>
-            <a:pPr algn="l" indent="0" marL="0">
+            <a:pPr marL="0" indent="0" algn="l">
               <a:lnSpc>
                 <a:spcPct val="118000"/>
               </a:lnSpc>
@@ -6405,7 +6148,7 @@
             <a:endParaRPr lang="en-US" sz="1150" dirty="0"/>
           </a:p>
           <a:p>
-            <a:pPr algn="l" indent="0" marL="0">
+            <a:pPr marL="0" indent="0" algn="l">
               <a:lnSpc>
                 <a:spcPct val="118000"/>
               </a:lnSpc>
@@ -6425,7 +6168,7 @@
             <a:endParaRPr lang="en-US" sz="1150" dirty="0"/>
           </a:p>
           <a:p>
-            <a:pPr algn="l" indent="0" marL="0">
+            <a:pPr marL="0" indent="0" algn="l">
               <a:lnSpc>
                 <a:spcPct val="118000"/>
               </a:lnSpc>
@@ -6445,7 +6188,7 @@
             <a:endParaRPr lang="en-US" sz="1150" dirty="0"/>
           </a:p>
           <a:p>
-            <a:pPr algn="l" indent="0" marL="0">
+            <a:pPr marL="0" indent="0" algn="l">
               <a:lnSpc>
                 <a:spcPct val="118000"/>
               </a:lnSpc>
@@ -6465,7 +6208,7 @@
             <a:endParaRPr lang="en-US" sz="1150" dirty="0"/>
           </a:p>
           <a:p>
-            <a:pPr algn="l" indent="0" marL="0">
+            <a:pPr marL="0" indent="0" algn="l">
               <a:lnSpc>
                 <a:spcPct val="118000"/>
               </a:lnSpc>
@@ -6485,7 +6228,7 @@
             <a:endParaRPr lang="en-US" sz="1150" dirty="0"/>
           </a:p>
           <a:p>
-            <a:pPr algn="l" indent="0" marL="0">
+            <a:pPr marL="0" indent="0" algn="l">
               <a:lnSpc>
                 <a:spcPct val="118000"/>
               </a:lnSpc>
@@ -6505,7 +6248,7 @@
             <a:endParaRPr lang="en-US" sz="1150" dirty="0"/>
           </a:p>
           <a:p>
-            <a:pPr algn="l" indent="0" marL="0">
+            <a:pPr marL="0" indent="0" algn="l">
               <a:lnSpc>
                 <a:spcPct val="118000"/>
               </a:lnSpc>
@@ -6525,7 +6268,7 @@
             <a:endParaRPr lang="en-US" sz="1150" dirty="0"/>
           </a:p>
           <a:p>
-            <a:pPr algn="l" indent="0" marL="0">
+            <a:pPr marL="0" indent="0" algn="l">
               <a:lnSpc>
                 <a:spcPct val="118000"/>
               </a:lnSpc>
@@ -6567,7 +6310,7 @@
           <a:bodyPr wrap="square" lIns="0" tIns="0" rIns="0" bIns="0" rtlCol="0" anchor="ctr"/>
           <a:lstStyle/>
           <a:p>
-            <a:pPr algn="l" indent="0" marL="0">
+            <a:pPr marL="0" indent="0" algn="l">
               <a:buNone/>
             </a:pPr>
             <a:r>
@@ -6606,7 +6349,7 @@
           <a:bodyPr wrap="square" lIns="0" tIns="0" rIns="0" bIns="0" rtlCol="0" anchor="ctr"/>
           <a:lstStyle/>
           <a:p>
-            <a:pPr algn="r" indent="0" marL="0">
+            <a:pPr marL="0" indent="0" algn="r">
               <a:buNone/>
             </a:pPr>
             <a:r>
@@ -6640,6 +6383,7 @@
         <a:solidFill>
           <a:srgbClr val="FFFFFF"/>
         </a:solidFill>
+        <a:effectLst/>
       </p:bgPr>
     </p:bg>
     <p:spTree>
@@ -6697,7 +6441,7 @@
           <a:bodyPr wrap="square" lIns="0" tIns="0" rIns="0" bIns="0" rtlCol="0" anchor="ctr"/>
           <a:lstStyle/>
           <a:p>
-            <a:pPr algn="ctr" indent="0" marL="0">
+            <a:pPr marL="0" indent="0" algn="ctr">
               <a:buNone/>
             </a:pPr>
             <a:r>
@@ -6736,7 +6480,7 @@
           <a:bodyPr wrap="square" lIns="0" tIns="0" rIns="0" bIns="0" rtlCol="0" anchor="ctr"/>
           <a:lstStyle/>
           <a:p>
-            <a:pPr indent="0" marL="0">
+            <a:pPr marL="0" indent="0">
               <a:buNone/>
             </a:pPr>
             <a:r>
@@ -6902,7 +6646,7 @@
           <a:bodyPr wrap="square" lIns="0" tIns="0" rIns="0" bIns="0" rtlCol="0" anchor="ctr"/>
           <a:lstStyle/>
           <a:p>
-            <a:pPr algn="ctr" indent="0" marL="0">
+            <a:pPr marL="0" indent="0" algn="ctr">
               <a:buNone/>
             </a:pPr>
             <a:r>
@@ -6941,7 +6685,7 @@
           <a:bodyPr wrap="square" lIns="0" tIns="0" rIns="0" bIns="0" rtlCol="0" anchor="ctr"/>
           <a:lstStyle/>
           <a:p>
-            <a:pPr algn="ctr" indent="0" marL="0">
+            <a:pPr marL="0" indent="0" algn="ctr">
               <a:buNone/>
             </a:pPr>
             <a:r>
@@ -6980,7 +6724,7 @@
           </a:solidFill>
           <a:ln/>
           <a:effectLst>
-            <a:outerShdw sx="100000" sy="100000" kx="0" ky="0" algn="bl" rotWithShape="0" blurRad="114300" dist="38100" dir="5400000">
+            <a:outerShdw blurRad="114300" dist="38100" dir="5400000" algn="bl" rotWithShape="0">
               <a:srgbClr val="000000">
                 <a:alpha val="22000"/>
               </a:srgbClr>
@@ -7009,7 +6753,7 @@
           <a:bodyPr wrap="square" lIns="0" tIns="0" rIns="0" bIns="0" rtlCol="0" anchor="t"/>
           <a:lstStyle/>
           <a:p>
-            <a:pPr algn="l" indent="0" marL="0">
+            <a:pPr marL="0" indent="0" algn="l">
               <a:lnSpc>
                 <a:spcPct val="118000"/>
               </a:lnSpc>
@@ -7029,7 +6773,7 @@
             <a:endParaRPr lang="en-US" sz="1150" dirty="0"/>
           </a:p>
           <a:p>
-            <a:pPr algn="l" indent="0" marL="0">
+            <a:pPr marL="0" indent="0" algn="l">
               <a:lnSpc>
                 <a:spcPct val="118000"/>
               </a:lnSpc>
@@ -7049,7 +6793,7 @@
             <a:endParaRPr lang="en-US" sz="1150" dirty="0"/>
           </a:p>
           <a:p>
-            <a:pPr algn="l" indent="0" marL="0">
+            <a:pPr marL="0" indent="0" algn="l">
               <a:lnSpc>
                 <a:spcPct val="118000"/>
               </a:lnSpc>
@@ -7069,7 +6813,7 @@
             <a:endParaRPr lang="en-US" sz="1150" dirty="0"/>
           </a:p>
           <a:p>
-            <a:pPr algn="l" indent="0" marL="0">
+            <a:pPr marL="0" indent="0" algn="l">
               <a:lnSpc>
                 <a:spcPct val="118000"/>
               </a:lnSpc>
@@ -7089,7 +6833,7 @@
             <a:endParaRPr lang="en-US" sz="1150" dirty="0"/>
           </a:p>
           <a:p>
-            <a:pPr algn="l" indent="0" marL="0">
+            <a:pPr marL="0" indent="0" algn="l">
               <a:lnSpc>
                 <a:spcPct val="118000"/>
               </a:lnSpc>
@@ -7109,7 +6853,7 @@
             <a:endParaRPr lang="en-US" sz="1150" dirty="0"/>
           </a:p>
           <a:p>
-            <a:pPr algn="l" indent="0" marL="0">
+            <a:pPr marL="0" indent="0" algn="l">
               <a:lnSpc>
                 <a:spcPct val="118000"/>
               </a:lnSpc>
@@ -7129,7 +6873,7 @@
             <a:endParaRPr lang="en-US" sz="1150" dirty="0"/>
           </a:p>
           <a:p>
-            <a:pPr algn="l" indent="0" marL="0">
+            <a:pPr marL="0" indent="0" algn="l">
               <a:lnSpc>
                 <a:spcPct val="118000"/>
               </a:lnSpc>
@@ -7149,7 +6893,7 @@
             <a:endParaRPr lang="en-US" sz="1150" dirty="0"/>
           </a:p>
           <a:p>
-            <a:pPr algn="l" indent="0" marL="0">
+            <a:pPr marL="0" indent="0" algn="l">
               <a:lnSpc>
                 <a:spcPct val="118000"/>
               </a:lnSpc>
@@ -7169,7 +6913,7 @@
             <a:endParaRPr lang="en-US" sz="1150" dirty="0"/>
           </a:p>
           <a:p>
-            <a:pPr algn="l" indent="0" marL="0">
+            <a:pPr marL="0" indent="0" algn="l">
               <a:lnSpc>
                 <a:spcPct val="118000"/>
               </a:lnSpc>
@@ -7211,7 +6955,7 @@
           <a:bodyPr wrap="square" lIns="0" tIns="0" rIns="0" bIns="0" rtlCol="0" anchor="ctr"/>
           <a:lstStyle/>
           <a:p>
-            <a:pPr algn="l" indent="0" marL="0">
+            <a:pPr marL="0" indent="0" algn="l">
               <a:buNone/>
             </a:pPr>
             <a:r>
@@ -7250,7 +6994,7 @@
           <a:bodyPr wrap="square" lIns="0" tIns="0" rIns="0" bIns="0" rtlCol="0" anchor="ctr"/>
           <a:lstStyle/>
           <a:p>
-            <a:pPr algn="r" indent="0" marL="0">
+            <a:pPr marL="0" indent="0" algn="r">
               <a:buNone/>
             </a:pPr>
             <a:r>
@@ -7284,6 +7028,7 @@
         <a:solidFill>
           <a:srgbClr val="FFFFFF"/>
         </a:solidFill>
+        <a:effectLst/>
       </p:bgPr>
     </p:bg>
     <p:spTree>
@@ -7341,7 +7086,7 @@
           <a:bodyPr wrap="square" lIns="0" tIns="0" rIns="0" bIns="0" rtlCol="0" anchor="ctr"/>
           <a:lstStyle/>
           <a:p>
-            <a:pPr algn="ctr" indent="0" marL="0">
+            <a:pPr marL="0" indent="0" algn="ctr">
               <a:buNone/>
             </a:pPr>
             <a:r>
@@ -7380,7 +7125,7 @@
           <a:bodyPr wrap="square" lIns="0" tIns="0" rIns="0" bIns="0" rtlCol="0" anchor="ctr"/>
           <a:lstStyle/>
           <a:p>
-            <a:pPr indent="0" marL="0">
+            <a:pPr marL="0" indent="0">
               <a:buNone/>
             </a:pPr>
             <a:r>
@@ -7530,7 +7275,7 @@
             <a:prstDash val="solid"/>
           </a:ln>
           <a:effectLst>
-            <a:outerShdw sx="100000" sy="100000" kx="0" ky="0" algn="bl" rotWithShape="0" blurRad="63500" dist="12700" dir="5400000">
+            <a:outerShdw blurRad="63500" dist="12700" dir="5400000" algn="bl" rotWithShape="0">
               <a:srgbClr val="000000">
                 <a:alpha val="12000"/>
               </a:srgbClr>
@@ -7559,7 +7304,7 @@
           <a:bodyPr wrap="square" lIns="0" tIns="0" rIns="0" bIns="0" rtlCol="0" anchor="ctr"/>
           <a:lstStyle/>
           <a:p>
-            <a:pPr indent="0" marL="0">
+            <a:pPr marL="0" indent="0">
               <a:buNone/>
             </a:pPr>
             <a:r>
@@ -7618,7 +7363,7 @@
           <a:bodyPr wrap="square" lIns="0" tIns="0" rIns="0" bIns="0" rtlCol="0" anchor="ctr"/>
           <a:lstStyle/>
           <a:p>
-            <a:pPr algn="ctr" indent="0" marL="0">
+            <a:pPr marL="0" indent="0" algn="ctr">
               <a:buNone/>
             </a:pPr>
             <a:r>
@@ -7657,7 +7402,7 @@
           </a:solidFill>
           <a:ln/>
           <a:effectLst>
-            <a:outerShdw sx="100000" sy="100000" kx="0" ky="0" algn="bl" rotWithShape="0" blurRad="114300" dist="38100" dir="5400000">
+            <a:outerShdw blurRad="114300" dist="38100" dir="5400000" algn="bl" rotWithShape="0">
               <a:srgbClr val="000000">
                 <a:alpha val="22000"/>
               </a:srgbClr>
@@ -7686,7 +7431,7 @@
           <a:bodyPr wrap="square" lIns="0" tIns="0" rIns="0" bIns="0" rtlCol="0" anchor="t"/>
           <a:lstStyle/>
           <a:p>
-            <a:pPr algn="l" indent="0" marL="0">
+            <a:pPr marL="0" indent="0" algn="l">
               <a:lnSpc>
                 <a:spcPct val="118000"/>
               </a:lnSpc>
@@ -7706,7 +7451,7 @@
             <a:endParaRPr lang="en-US" sz="1150" dirty="0"/>
           </a:p>
           <a:p>
-            <a:pPr algn="l" indent="0" marL="0">
+            <a:pPr marL="0" indent="0" algn="l">
               <a:lnSpc>
                 <a:spcPct val="118000"/>
               </a:lnSpc>
@@ -7726,7 +7471,7 @@
             <a:endParaRPr lang="en-US" sz="1150" dirty="0"/>
           </a:p>
           <a:p>
-            <a:pPr algn="l" indent="0" marL="0">
+            <a:pPr marL="0" indent="0" algn="l">
               <a:lnSpc>
                 <a:spcPct val="118000"/>
               </a:lnSpc>
@@ -7746,7 +7491,7 @@
             <a:endParaRPr lang="en-US" sz="1150" dirty="0"/>
           </a:p>
           <a:p>
-            <a:pPr algn="l" indent="0" marL="0">
+            <a:pPr marL="0" indent="0" algn="l">
               <a:lnSpc>
                 <a:spcPct val="118000"/>
               </a:lnSpc>
@@ -7766,7 +7511,7 @@
             <a:endParaRPr lang="en-US" sz="1150" dirty="0"/>
           </a:p>
           <a:p>
-            <a:pPr algn="l" indent="0" marL="0">
+            <a:pPr marL="0" indent="0" algn="l">
               <a:lnSpc>
                 <a:spcPct val="118000"/>
               </a:lnSpc>
@@ -7786,7 +7531,7 @@
             <a:endParaRPr lang="en-US" sz="1150" dirty="0"/>
           </a:p>
           <a:p>
-            <a:pPr algn="l" indent="0" marL="0">
+            <a:pPr marL="0" indent="0" algn="l">
               <a:lnSpc>
                 <a:spcPct val="118000"/>
               </a:lnSpc>
@@ -7806,7 +7551,7 @@
             <a:endParaRPr lang="en-US" sz="1150" dirty="0"/>
           </a:p>
           <a:p>
-            <a:pPr algn="l" indent="0" marL="0">
+            <a:pPr marL="0" indent="0" algn="l">
               <a:lnSpc>
                 <a:spcPct val="118000"/>
               </a:lnSpc>
@@ -7826,7 +7571,7 @@
             <a:endParaRPr lang="en-US" sz="1150" dirty="0"/>
           </a:p>
           <a:p>
-            <a:pPr algn="l" indent="0" marL="0">
+            <a:pPr marL="0" indent="0" algn="l">
               <a:lnSpc>
                 <a:spcPct val="118000"/>
               </a:lnSpc>
@@ -7846,7 +7591,7 @@
             <a:endParaRPr lang="en-US" sz="1150" dirty="0"/>
           </a:p>
           <a:p>
-            <a:pPr algn="l" indent="0" marL="0">
+            <a:pPr marL="0" indent="0" algn="l">
               <a:lnSpc>
                 <a:spcPct val="118000"/>
               </a:lnSpc>
@@ -7866,7 +7611,7 @@
             <a:endParaRPr lang="en-US" sz="1150" dirty="0"/>
           </a:p>
           <a:p>
-            <a:pPr algn="l" indent="0" marL="0">
+            <a:pPr marL="0" indent="0" algn="l">
               <a:lnSpc>
                 <a:spcPct val="118000"/>
               </a:lnSpc>
@@ -7908,7 +7653,7 @@
           <a:bodyPr wrap="square" lIns="0" tIns="0" rIns="0" bIns="0" rtlCol="0" anchor="ctr"/>
           <a:lstStyle/>
           <a:p>
-            <a:pPr algn="l" indent="0" marL="0">
+            <a:pPr marL="0" indent="0" algn="l">
               <a:buNone/>
             </a:pPr>
             <a:r>
@@ -7947,7 +7692,7 @@
           <a:bodyPr wrap="square" lIns="0" tIns="0" rIns="0" bIns="0" rtlCol="0" anchor="ctr"/>
           <a:lstStyle/>
           <a:p>
-            <a:pPr algn="r" indent="0" marL="0">
+            <a:pPr marL="0" indent="0" algn="r">
               <a:buNone/>
             </a:pPr>
             <a:r>
@@ -7981,6 +7726,7 @@
         <a:solidFill>
           <a:srgbClr val="FFFFFF"/>
         </a:solidFill>
+        <a:effectLst/>
       </p:bgPr>
     </p:bg>
     <p:spTree>
@@ -8038,7 +7784,7 @@
           <a:bodyPr wrap="square" lIns="0" tIns="0" rIns="0" bIns="0" rtlCol="0" anchor="ctr"/>
           <a:lstStyle/>
           <a:p>
-            <a:pPr algn="ctr" indent="0" marL="0">
+            <a:pPr marL="0" indent="0" algn="ctr">
               <a:buNone/>
             </a:pPr>
             <a:r>
@@ -8077,7 +7823,7 @@
           <a:bodyPr wrap="square" lIns="0" tIns="0" rIns="0" bIns="0" rtlCol="0" anchor="ctr"/>
           <a:lstStyle/>
           <a:p>
-            <a:pPr indent="0" marL="0">
+            <a:pPr marL="0" indent="0">
               <a:buNone/>
             </a:pPr>
             <a:r>
@@ -8196,27 +7942,6 @@
                 <a:cs typeface="Calibri" pitchFamily="34" charset="-120"/>
               </a:rPr>
               <a:t>forwards conserve l'état final (opacité 0).</a:t>
-            </a:r>
-            <a:endParaRPr lang="en-US" sz="1450" dirty="0"/>
-          </a:p>
-          <a:p>
-            <a:pPr marL="228600" indent="-228600">
-              <a:spcAft>
-                <a:spcPts val="900"/>
-              </a:spcAft>
-              <a:buSzPct val="100000"/>
-              <a:buChar char="•"/>
-            </a:pPr>
-            <a:r>
-              <a:rPr lang="en-US" sz="1450" dirty="0">
-                <a:solidFill>
-                  <a:srgbClr val="353535"/>
-                </a:solidFill>
-                <a:latin typeface="Calibri" pitchFamily="34" charset="0"/>
-                <a:ea typeface="Calibri" pitchFamily="34" charset="-122"/>
-                <a:cs typeface="Calibri" pitchFamily="34" charset="-120"/>
-              </a:rPr>
-              <a:t>Choix : focaliser l'attention au 1er chargement.</a:t>
             </a:r>
             <a:endParaRPr lang="en-US" sz="1450" dirty="0"/>
           </a:p>
@@ -8288,7 +8013,7 @@
           <a:bodyPr wrap="square" lIns="0" tIns="0" rIns="0" bIns="0" rtlCol="0" anchor="ctr"/>
           <a:lstStyle/>
           <a:p>
-            <a:pPr algn="ctr" indent="0" marL="0">
+            <a:pPr marL="0" indent="0" algn="ctr">
               <a:buNone/>
             </a:pPr>
             <a:r>
@@ -8327,7 +8052,7 @@
           </a:solidFill>
           <a:ln/>
           <a:effectLst>
-            <a:outerShdw sx="100000" sy="100000" kx="0" ky="0" algn="bl" rotWithShape="0" blurRad="114300" dist="38100" dir="5400000">
+            <a:outerShdw blurRad="114300" dist="38100" dir="5400000" algn="bl" rotWithShape="0">
               <a:srgbClr val="000000">
                 <a:alpha val="22000"/>
               </a:srgbClr>
@@ -8356,7 +8081,7 @@
           <a:bodyPr wrap="square" lIns="0" tIns="0" rIns="0" bIns="0" rtlCol="0" anchor="t"/>
           <a:lstStyle/>
           <a:p>
-            <a:pPr algn="l" indent="0" marL="0">
+            <a:pPr marL="0" indent="0" algn="l">
               <a:lnSpc>
                 <a:spcPct val="118000"/>
               </a:lnSpc>
@@ -8376,7 +8101,7 @@
             <a:endParaRPr lang="en-US" sz="1150" dirty="0"/>
           </a:p>
           <a:p>
-            <a:pPr algn="l" indent="0" marL="0">
+            <a:pPr marL="0" indent="0" algn="l">
               <a:lnSpc>
                 <a:spcPct val="118000"/>
               </a:lnSpc>
@@ -8396,7 +8121,7 @@
             <a:endParaRPr lang="en-US" sz="1150" dirty="0"/>
           </a:p>
           <a:p>
-            <a:pPr algn="l" indent="0" marL="0">
+            <a:pPr marL="0" indent="0" algn="l">
               <a:lnSpc>
                 <a:spcPct val="118000"/>
               </a:lnSpc>
@@ -8416,7 +8141,7 @@
             <a:endParaRPr lang="en-US" sz="1150" dirty="0"/>
           </a:p>
           <a:p>
-            <a:pPr algn="l" indent="0" marL="0">
+            <a:pPr marL="0" indent="0" algn="l">
               <a:lnSpc>
                 <a:spcPct val="118000"/>
               </a:lnSpc>
@@ -8436,7 +8161,7 @@
             <a:endParaRPr lang="en-US" sz="1150" dirty="0"/>
           </a:p>
           <a:p>
-            <a:pPr algn="l" indent="0" marL="0">
+            <a:pPr marL="0" indent="0" algn="l">
               <a:lnSpc>
                 <a:spcPct val="118000"/>
               </a:lnSpc>
@@ -8456,7 +8181,7 @@
             <a:endParaRPr lang="en-US" sz="1150" dirty="0"/>
           </a:p>
           <a:p>
-            <a:pPr algn="l" indent="0" marL="0">
+            <a:pPr marL="0" indent="0" algn="l">
               <a:lnSpc>
                 <a:spcPct val="118000"/>
               </a:lnSpc>
@@ -8476,7 +8201,7 @@
             <a:endParaRPr lang="en-US" sz="1150" dirty="0"/>
           </a:p>
           <a:p>
-            <a:pPr algn="l" indent="0" marL="0">
+            <a:pPr marL="0" indent="0" algn="l">
               <a:lnSpc>
                 <a:spcPct val="118000"/>
               </a:lnSpc>
@@ -8496,7 +8221,7 @@
             <a:endParaRPr lang="en-US" sz="1150" dirty="0"/>
           </a:p>
           <a:p>
-            <a:pPr algn="l" indent="0" marL="0">
+            <a:pPr marL="0" indent="0" algn="l">
               <a:lnSpc>
                 <a:spcPct val="118000"/>
               </a:lnSpc>
@@ -8516,7 +8241,7 @@
             <a:endParaRPr lang="en-US" sz="1150" dirty="0"/>
           </a:p>
           <a:p>
-            <a:pPr algn="l" indent="0" marL="0">
+            <a:pPr marL="0" indent="0" algn="l">
               <a:lnSpc>
                 <a:spcPct val="118000"/>
               </a:lnSpc>
@@ -8536,7 +8261,7 @@
             <a:endParaRPr lang="en-US" sz="1150" dirty="0"/>
           </a:p>
           <a:p>
-            <a:pPr algn="l" indent="0" marL="0">
+            <a:pPr marL="0" indent="0" algn="l">
               <a:lnSpc>
                 <a:spcPct val="118000"/>
               </a:lnSpc>
@@ -8556,7 +8281,7 @@
             <a:endParaRPr lang="en-US" sz="1150" dirty="0"/>
           </a:p>
           <a:p>
-            <a:pPr algn="l" indent="0" marL="0">
+            <a:pPr marL="0" indent="0" algn="l">
               <a:lnSpc>
                 <a:spcPct val="118000"/>
               </a:lnSpc>
@@ -8576,7 +8301,7 @@
             <a:endParaRPr lang="en-US" sz="1150" dirty="0"/>
           </a:p>
           <a:p>
-            <a:pPr algn="l" indent="0" marL="0">
+            <a:pPr marL="0" indent="0" algn="l">
               <a:lnSpc>
                 <a:spcPct val="118000"/>
               </a:lnSpc>
@@ -8596,7 +8321,7 @@
             <a:endParaRPr lang="en-US" sz="1150" dirty="0"/>
           </a:p>
           <a:p>
-            <a:pPr algn="l" indent="0" marL="0">
+            <a:pPr marL="0" indent="0" algn="l">
               <a:lnSpc>
                 <a:spcPct val="118000"/>
               </a:lnSpc>
@@ -8616,7 +8341,7 @@
             <a:endParaRPr lang="en-US" sz="1150" dirty="0"/>
           </a:p>
           <a:p>
-            <a:pPr algn="l" indent="0" marL="0">
+            <a:pPr marL="0" indent="0" algn="l">
               <a:lnSpc>
                 <a:spcPct val="118000"/>
               </a:lnSpc>
@@ -8636,7 +8361,7 @@
             <a:endParaRPr lang="en-US" sz="1150" dirty="0"/>
           </a:p>
           <a:p>
-            <a:pPr algn="l" indent="0" marL="0">
+            <a:pPr marL="0" indent="0" algn="l">
               <a:lnSpc>
                 <a:spcPct val="118000"/>
               </a:lnSpc>
@@ -8678,7 +8403,7 @@
           <a:bodyPr wrap="square" lIns="0" tIns="0" rIns="0" bIns="0" rtlCol="0" anchor="ctr"/>
           <a:lstStyle/>
           <a:p>
-            <a:pPr algn="l" indent="0" marL="0">
+            <a:pPr marL="0" indent="0" algn="l">
               <a:buNone/>
             </a:pPr>
             <a:r>
@@ -8717,7 +8442,7 @@
           <a:bodyPr wrap="square" lIns="0" tIns="0" rIns="0" bIns="0" rtlCol="0" anchor="ctr"/>
           <a:lstStyle/>
           <a:p>
-            <a:pPr algn="r" indent="0" marL="0">
+            <a:pPr marL="0" indent="0" algn="r">
               <a:buNone/>
             </a:pPr>
             <a:r>
@@ -8751,6 +8476,7 @@
         <a:solidFill>
           <a:srgbClr val="FFFFFF"/>
         </a:solidFill>
+        <a:effectLst/>
       </p:bgPr>
     </p:bg>
     <p:spTree>
@@ -8808,7 +8534,7 @@
           <a:bodyPr wrap="square" lIns="0" tIns="0" rIns="0" bIns="0" rtlCol="0" anchor="ctr"/>
           <a:lstStyle/>
           <a:p>
-            <a:pPr algn="ctr" indent="0" marL="0">
+            <a:pPr marL="0" indent="0" algn="ctr">
               <a:buNone/>
             </a:pPr>
             <a:r>
@@ -8847,7 +8573,7 @@
           <a:bodyPr wrap="square" lIns="0" tIns="0" rIns="0" bIns="0" rtlCol="0" anchor="ctr"/>
           <a:lstStyle/>
           <a:p>
-            <a:pPr indent="0" marL="0">
+            <a:pPr marL="0" indent="0">
               <a:buNone/>
             </a:pPr>
             <a:r>
@@ -8992,7 +8718,7 @@
           </a:solidFill>
           <a:ln/>
           <a:effectLst>
-            <a:outerShdw sx="100000" sy="100000" kx="0" ky="0" algn="bl" rotWithShape="0" blurRad="76200" dist="25400" dir="5400000">
+            <a:outerShdw blurRad="76200" dist="25400" dir="5400000" algn="bl" rotWithShape="0">
               <a:srgbClr val="000000">
                 <a:alpha val="25000"/>
               </a:srgbClr>
@@ -9021,7 +8747,7 @@
           <a:bodyPr wrap="square" lIns="0" tIns="0" rIns="0" bIns="0" rtlCol="0" anchor="ctr"/>
           <a:lstStyle/>
           <a:p>
-            <a:pPr algn="ctr" indent="0" marL="0">
+            <a:pPr marL="0" indent="0" algn="ctr">
               <a:buNone/>
             </a:pPr>
             <a:r>
@@ -9060,7 +8786,7 @@
           </a:solidFill>
           <a:ln/>
           <a:effectLst>
-            <a:outerShdw sx="100000" sy="100000" kx="0" ky="0" algn="bl" rotWithShape="0" blurRad="114300" dist="38100" dir="5400000">
+            <a:outerShdw blurRad="114300" dist="38100" dir="5400000" algn="bl" rotWithShape="0">
               <a:srgbClr val="000000">
                 <a:alpha val="22000"/>
               </a:srgbClr>
@@ -9089,7 +8815,7 @@
           <a:bodyPr wrap="square" lIns="0" tIns="0" rIns="0" bIns="0" rtlCol="0" anchor="t"/>
           <a:lstStyle/>
           <a:p>
-            <a:pPr algn="l" indent="0" marL="0">
+            <a:pPr marL="0" indent="0" algn="l">
               <a:lnSpc>
                 <a:spcPct val="118000"/>
               </a:lnSpc>
@@ -9109,7 +8835,7 @@
             <a:endParaRPr lang="en-US" sz="1150" dirty="0"/>
           </a:p>
           <a:p>
-            <a:pPr algn="l" indent="0" marL="0">
+            <a:pPr marL="0" indent="0" algn="l">
               <a:lnSpc>
                 <a:spcPct val="118000"/>
               </a:lnSpc>
@@ -9129,7 +8855,7 @@
             <a:endParaRPr lang="en-US" sz="1150" dirty="0"/>
           </a:p>
           <a:p>
-            <a:pPr algn="l" indent="0" marL="0">
+            <a:pPr marL="0" indent="0" algn="l">
               <a:lnSpc>
                 <a:spcPct val="118000"/>
               </a:lnSpc>
@@ -9149,7 +8875,7 @@
             <a:endParaRPr lang="en-US" sz="1150" dirty="0"/>
           </a:p>
           <a:p>
-            <a:pPr algn="l" indent="0" marL="0">
+            <a:pPr marL="0" indent="0" algn="l">
               <a:lnSpc>
                 <a:spcPct val="118000"/>
               </a:lnSpc>
@@ -9169,7 +8895,7 @@
             <a:endParaRPr lang="en-US" sz="1150" dirty="0"/>
           </a:p>
           <a:p>
-            <a:pPr algn="l" indent="0" marL="0">
+            <a:pPr marL="0" indent="0" algn="l">
               <a:lnSpc>
                 <a:spcPct val="118000"/>
               </a:lnSpc>
@@ -9189,7 +8915,7 @@
             <a:endParaRPr lang="en-US" sz="1150" dirty="0"/>
           </a:p>
           <a:p>
-            <a:pPr algn="l" indent="0" marL="0">
+            <a:pPr marL="0" indent="0" algn="l">
               <a:lnSpc>
                 <a:spcPct val="118000"/>
               </a:lnSpc>
@@ -9209,7 +8935,7 @@
             <a:endParaRPr lang="en-US" sz="1150" dirty="0"/>
           </a:p>
           <a:p>
-            <a:pPr algn="l" indent="0" marL="0">
+            <a:pPr marL="0" indent="0" algn="l">
               <a:lnSpc>
                 <a:spcPct val="118000"/>
               </a:lnSpc>
@@ -9229,7 +8955,7 @@
             <a:endParaRPr lang="en-US" sz="1150" dirty="0"/>
           </a:p>
           <a:p>
-            <a:pPr algn="l" indent="0" marL="0">
+            <a:pPr marL="0" indent="0" algn="l">
               <a:lnSpc>
                 <a:spcPct val="118000"/>
               </a:lnSpc>
@@ -9249,7 +8975,7 @@
             <a:endParaRPr lang="en-US" sz="1150" dirty="0"/>
           </a:p>
           <a:p>
-            <a:pPr algn="l" indent="0" marL="0">
+            <a:pPr marL="0" indent="0" algn="l">
               <a:lnSpc>
                 <a:spcPct val="118000"/>
               </a:lnSpc>
@@ -9269,7 +8995,7 @@
             <a:endParaRPr lang="en-US" sz="1150" dirty="0"/>
           </a:p>
           <a:p>
-            <a:pPr algn="l" indent="0" marL="0">
+            <a:pPr marL="0" indent="0" algn="l">
               <a:lnSpc>
                 <a:spcPct val="118000"/>
               </a:lnSpc>
@@ -9289,7 +9015,7 @@
             <a:endParaRPr lang="en-US" sz="1150" dirty="0"/>
           </a:p>
           <a:p>
-            <a:pPr algn="l" indent="0" marL="0">
+            <a:pPr marL="0" indent="0" algn="l">
               <a:lnSpc>
                 <a:spcPct val="118000"/>
               </a:lnSpc>
@@ -9309,7 +9035,7 @@
             <a:endParaRPr lang="en-US" sz="1150" dirty="0"/>
           </a:p>
           <a:p>
-            <a:pPr algn="l" indent="0" marL="0">
+            <a:pPr marL="0" indent="0" algn="l">
               <a:lnSpc>
                 <a:spcPct val="118000"/>
               </a:lnSpc>
@@ -9351,7 +9077,7 @@
           <a:bodyPr wrap="square" lIns="0" tIns="0" rIns="0" bIns="0" rtlCol="0" anchor="ctr"/>
           <a:lstStyle/>
           <a:p>
-            <a:pPr algn="l" indent="0" marL="0">
+            <a:pPr marL="0" indent="0" algn="l">
               <a:buNone/>
             </a:pPr>
             <a:r>
@@ -9390,7 +9116,7 @@
           <a:bodyPr wrap="square" lIns="0" tIns="0" rIns="0" bIns="0" rtlCol="0" anchor="ctr"/>
           <a:lstStyle/>
           <a:p>
-            <a:pPr algn="r" indent="0" marL="0">
+            <a:pPr marL="0" indent="0" algn="r">
               <a:buNone/>
             </a:pPr>
             <a:r>
@@ -9424,6 +9150,7 @@
         <a:solidFill>
           <a:srgbClr val="FFFFFF"/>
         </a:solidFill>
+        <a:effectLst/>
       </p:bgPr>
     </p:bg>
     <p:spTree>
@@ -9481,7 +9208,7 @@
           <a:bodyPr wrap="square" lIns="0" tIns="0" rIns="0" bIns="0" rtlCol="0" anchor="ctr"/>
           <a:lstStyle/>
           <a:p>
-            <a:pPr algn="ctr" indent="0" marL="0">
+            <a:pPr marL="0" indent="0" algn="ctr">
               <a:buNone/>
             </a:pPr>
             <a:r>
@@ -9520,7 +9247,7 @@
           <a:bodyPr wrap="square" lIns="0" tIns="0" rIns="0" bIns="0" rtlCol="0" anchor="ctr"/>
           <a:lstStyle/>
           <a:p>
-            <a:pPr indent="0" marL="0">
+            <a:pPr marL="0" indent="0">
               <a:buNone/>
             </a:pPr>
             <a:r>
@@ -9663,7 +9390,7 @@
           </a:solidFill>
           <a:ln/>
           <a:effectLst>
-            <a:outerShdw sx="100000" sy="100000" kx="0" ky="0" algn="bl" rotWithShape="0" blurRad="88900" dist="38100" dir="5400000">
+            <a:outerShdw blurRad="88900" dist="38100" dir="5400000" algn="bl" rotWithShape="0">
               <a:srgbClr val="000000">
                 <a:alpha val="40000"/>
               </a:srgbClr>
@@ -9692,7 +9419,7 @@
           <a:bodyPr wrap="square" lIns="0" tIns="0" rIns="0" bIns="0" rtlCol="0" anchor="ctr"/>
           <a:lstStyle/>
           <a:p>
-            <a:pPr algn="ctr" indent="0" marL="0">
+            <a:pPr marL="0" indent="0" algn="ctr">
               <a:buNone/>
             </a:pPr>
             <a:r>
@@ -9751,7 +9478,7 @@
           <a:bodyPr wrap="square" lIns="0" tIns="0" rIns="0" bIns="0" rtlCol="0" anchor="ctr"/>
           <a:lstStyle/>
           <a:p>
-            <a:pPr algn="ctr" indent="0" marL="0">
+            <a:pPr marL="0" indent="0" algn="ctr">
               <a:buNone/>
             </a:pPr>
             <a:r>
@@ -9790,7 +9517,7 @@
           </a:solidFill>
           <a:ln/>
           <a:effectLst>
-            <a:outerShdw sx="100000" sy="100000" kx="0" ky="0" algn="bl" rotWithShape="0" blurRad="114300" dist="38100" dir="5400000">
+            <a:outerShdw blurRad="114300" dist="38100" dir="5400000" algn="bl" rotWithShape="0">
               <a:srgbClr val="000000">
                 <a:alpha val="22000"/>
               </a:srgbClr>
@@ -9819,7 +9546,7 @@
           <a:bodyPr wrap="square" lIns="0" tIns="0" rIns="0" bIns="0" rtlCol="0" anchor="t"/>
           <a:lstStyle/>
           <a:p>
-            <a:pPr algn="l" indent="0" marL="0">
+            <a:pPr marL="0" indent="0" algn="l">
               <a:lnSpc>
                 <a:spcPct val="118000"/>
               </a:lnSpc>
@@ -9839,7 +9566,7 @@
             <a:endParaRPr lang="en-US" sz="1150" dirty="0"/>
           </a:p>
           <a:p>
-            <a:pPr algn="l" indent="0" marL="0">
+            <a:pPr marL="0" indent="0" algn="l">
               <a:lnSpc>
                 <a:spcPct val="118000"/>
               </a:lnSpc>
@@ -9859,7 +9586,7 @@
             <a:endParaRPr lang="en-US" sz="1150" dirty="0"/>
           </a:p>
           <a:p>
-            <a:pPr algn="l" indent="0" marL="0">
+            <a:pPr marL="0" indent="0" algn="l">
               <a:lnSpc>
                 <a:spcPct val="118000"/>
               </a:lnSpc>
@@ -9879,7 +9606,7 @@
             <a:endParaRPr lang="en-US" sz="1150" dirty="0"/>
           </a:p>
           <a:p>
-            <a:pPr algn="l" indent="0" marL="0">
+            <a:pPr marL="0" indent="0" algn="l">
               <a:lnSpc>
                 <a:spcPct val="118000"/>
               </a:lnSpc>
@@ -9899,7 +9626,7 @@
             <a:endParaRPr lang="en-US" sz="1150" dirty="0"/>
           </a:p>
           <a:p>
-            <a:pPr algn="l" indent="0" marL="0">
+            <a:pPr marL="0" indent="0" algn="l">
               <a:lnSpc>
                 <a:spcPct val="118000"/>
               </a:lnSpc>
@@ -9919,7 +9646,7 @@
             <a:endParaRPr lang="en-US" sz="1150" dirty="0"/>
           </a:p>
           <a:p>
-            <a:pPr algn="l" indent="0" marL="0">
+            <a:pPr marL="0" indent="0" algn="l">
               <a:lnSpc>
                 <a:spcPct val="118000"/>
               </a:lnSpc>
@@ -9939,7 +9666,7 @@
             <a:endParaRPr lang="en-US" sz="1150" dirty="0"/>
           </a:p>
           <a:p>
-            <a:pPr algn="l" indent="0" marL="0">
+            <a:pPr marL="0" indent="0" algn="l">
               <a:lnSpc>
                 <a:spcPct val="118000"/>
               </a:lnSpc>
@@ -9959,7 +9686,7 @@
             <a:endParaRPr lang="en-US" sz="1150" dirty="0"/>
           </a:p>
           <a:p>
-            <a:pPr algn="l" indent="0" marL="0">
+            <a:pPr marL="0" indent="0" algn="l">
               <a:lnSpc>
                 <a:spcPct val="118000"/>
               </a:lnSpc>
@@ -9979,7 +9706,7 @@
             <a:endParaRPr lang="en-US" sz="1150" dirty="0"/>
           </a:p>
           <a:p>
-            <a:pPr algn="l" indent="0" marL="0">
+            <a:pPr marL="0" indent="0" algn="l">
               <a:lnSpc>
                 <a:spcPct val="118000"/>
               </a:lnSpc>
@@ -9999,7 +9726,7 @@
             <a:endParaRPr lang="en-US" sz="1150" dirty="0"/>
           </a:p>
           <a:p>
-            <a:pPr algn="l" indent="0" marL="0">
+            <a:pPr marL="0" indent="0" algn="l">
               <a:lnSpc>
                 <a:spcPct val="118000"/>
               </a:lnSpc>
@@ -10041,7 +9768,7 @@
           <a:bodyPr wrap="square" lIns="0" tIns="0" rIns="0" bIns="0" rtlCol="0" anchor="ctr"/>
           <a:lstStyle/>
           <a:p>
-            <a:pPr algn="l" indent="0" marL="0">
+            <a:pPr marL="0" indent="0" algn="l">
               <a:buNone/>
             </a:pPr>
             <a:r>
@@ -10080,7 +9807,7 @@
           <a:bodyPr wrap="square" lIns="0" tIns="0" rIns="0" bIns="0" rtlCol="0" anchor="ctr"/>
           <a:lstStyle/>
           <a:p>
-            <a:pPr algn="r" indent="0" marL="0">
+            <a:pPr marL="0" indent="0" algn="r">
               <a:buNone/>
             </a:pPr>
             <a:r>
@@ -10399,4 +10126,299 @@
     </a:ext>
   </a:extLst>
 </a:theme>
+</file>
+
+<file path=ppt/theme/theme2.xml><?xml version="1.0" encoding="utf-8"?>
+<a:theme xmlns:a="http://schemas.openxmlformats.org/drawingml/2006/main" name="Thème Office">
+  <a:themeElements>
+    <a:clrScheme name="Office">
+      <a:dk1>
+        <a:sysClr val="windowText" lastClr="000000"/>
+      </a:dk1>
+      <a:lt1>
+        <a:sysClr val="window" lastClr="FFFFFF"/>
+      </a:lt1>
+      <a:dk2>
+        <a:srgbClr val="44546A"/>
+      </a:dk2>
+      <a:lt2>
+        <a:srgbClr val="E7E6E6"/>
+      </a:lt2>
+      <a:accent1>
+        <a:srgbClr val="4472C4"/>
+      </a:accent1>
+      <a:accent2>
+        <a:srgbClr val="ED7D31"/>
+      </a:accent2>
+      <a:accent3>
+        <a:srgbClr val="A5A5A5"/>
+      </a:accent3>
+      <a:accent4>
+        <a:srgbClr val="FFC000"/>
+      </a:accent4>
+      <a:accent5>
+        <a:srgbClr val="5B9BD5"/>
+      </a:accent5>
+      <a:accent6>
+        <a:srgbClr val="70AD47"/>
+      </a:accent6>
+      <a:hlink>
+        <a:srgbClr val="0563C1"/>
+      </a:hlink>
+      <a:folHlink>
+        <a:srgbClr val="954F72"/>
+      </a:folHlink>
+    </a:clrScheme>
+    <a:fontScheme name="Office">
+      <a:majorFont>
+        <a:latin typeface="Calibri Light" panose="020F0302020204030204"/>
+        <a:ea typeface=""/>
+        <a:cs typeface=""/>
+        <a:font script="Jpan" typeface="游ゴシック Light"/>
+        <a:font script="Hang" typeface="맑은 고딕"/>
+        <a:font script="Hans" typeface="等线 Light"/>
+        <a:font script="Hant" typeface="新細明體"/>
+        <a:font script="Arab" typeface="Times New Roman"/>
+        <a:font script="Hebr" typeface="Times New Roman"/>
+        <a:font script="Thai" typeface="Angsana New"/>
+        <a:font script="Ethi" typeface="Nyala"/>
+        <a:font script="Beng" typeface="Vrinda"/>
+        <a:font script="Gujr" typeface="Shruti"/>
+        <a:font script="Khmr" typeface="MoolBoran"/>
+        <a:font script="Knda" typeface="Tunga"/>
+        <a:font script="Guru" typeface="Raavi"/>
+        <a:font script="Cans" typeface="Euphemia"/>
+        <a:font script="Cher" typeface="Plantagenet Cherokee"/>
+        <a:font script="Yiii" typeface="Microsoft Yi Baiti"/>
+        <a:font script="Tibt" typeface="Microsoft Himalaya"/>
+        <a:font script="Thaa" typeface="MV Boli"/>
+        <a:font script="Deva" typeface="Mangal"/>
+        <a:font script="Telu" typeface="Gautami"/>
+        <a:font script="Taml" typeface="Latha"/>
+        <a:font script="Syrc" typeface="Estrangelo Edessa"/>
+        <a:font script="Orya" typeface="Kalinga"/>
+        <a:font script="Mlym" typeface="Kartika"/>
+        <a:font script="Laoo" typeface="DokChampa"/>
+        <a:font script="Sinh" typeface="Iskoola Pota"/>
+        <a:font script="Mong" typeface="Mongolian Baiti"/>
+        <a:font script="Viet" typeface="Times New Roman"/>
+        <a:font script="Uigh" typeface="Microsoft Uighur"/>
+        <a:font script="Geor" typeface="Sylfaen"/>
+        <a:font script="Armn" typeface="Arial"/>
+        <a:font script="Bugi" typeface="Leelawadee UI"/>
+        <a:font script="Bopo" typeface="Microsoft JhengHei"/>
+        <a:font script="Java" typeface="Javanese Text"/>
+        <a:font script="Lisu" typeface="Segoe UI"/>
+        <a:font script="Mymr" typeface="Myanmar Text"/>
+        <a:font script="Nkoo" typeface="Ebrima"/>
+        <a:font script="Olck" typeface="Nirmala UI"/>
+        <a:font script="Osma" typeface="Ebrima"/>
+        <a:font script="Phag" typeface="Phagspa"/>
+        <a:font script="Syrn" typeface="Estrangelo Edessa"/>
+        <a:font script="Syrj" typeface="Estrangelo Edessa"/>
+        <a:font script="Syre" typeface="Estrangelo Edessa"/>
+        <a:font script="Sora" typeface="Nirmala UI"/>
+        <a:font script="Tale" typeface="Microsoft Tai Le"/>
+        <a:font script="Talu" typeface="Microsoft New Tai Lue"/>
+        <a:font script="Tfng" typeface="Ebrima"/>
+      </a:majorFont>
+      <a:minorFont>
+        <a:latin typeface="Calibri" panose="020F0502020204030204"/>
+        <a:ea typeface=""/>
+        <a:cs typeface=""/>
+        <a:font script="Jpan" typeface="游ゴシック"/>
+        <a:font script="Hang" typeface="맑은 고딕"/>
+        <a:font script="Hans" typeface="等线"/>
+        <a:font script="Hant" typeface="新細明體"/>
+        <a:font script="Arab" typeface="Arial"/>
+        <a:font script="Hebr" typeface="Arial"/>
+        <a:font script="Thai" typeface="Cordia New"/>
+        <a:font script="Ethi" typeface="Nyala"/>
+        <a:font script="Beng" typeface="Vrinda"/>
+        <a:font script="Gujr" typeface="Shruti"/>
+        <a:font script="Khmr" typeface="DaunPenh"/>
+        <a:font script="Knda" typeface="Tunga"/>
+        <a:font script="Guru" typeface="Raavi"/>
+        <a:font script="Cans" typeface="Euphemia"/>
+        <a:font script="Cher" typeface="Plantagenet Cherokee"/>
+        <a:font script="Yiii" typeface="Microsoft Yi Baiti"/>
+        <a:font script="Tibt" typeface="Microsoft Himalaya"/>
+        <a:font script="Thaa" typeface="MV Boli"/>
+        <a:font script="Deva" typeface="Mangal"/>
+        <a:font script="Telu" typeface="Gautami"/>
+        <a:font script="Taml" typeface="Latha"/>
+        <a:font script="Syrc" typeface="Estrangelo Edessa"/>
+        <a:font script="Orya" typeface="Kalinga"/>
+        <a:font script="Mlym" typeface="Kartika"/>
+        <a:font script="Laoo" typeface="DokChampa"/>
+        <a:font script="Sinh" typeface="Iskoola Pota"/>
+        <a:font script="Mong" typeface="Mongolian Baiti"/>
+        <a:font script="Viet" typeface="Arial"/>
+        <a:font script="Uigh" typeface="Microsoft Uighur"/>
+        <a:font script="Geor" typeface="Sylfaen"/>
+        <a:font script="Armn" typeface="Arial"/>
+        <a:font script="Bugi" typeface="Leelawadee UI"/>
+        <a:font script="Bopo" typeface="Microsoft JhengHei"/>
+        <a:font script="Java" typeface="Javanese Text"/>
+        <a:font script="Lisu" typeface="Segoe UI"/>
+        <a:font script="Mymr" typeface="Myanmar Text"/>
+        <a:font script="Nkoo" typeface="Ebrima"/>
+        <a:font script="Olck" typeface="Nirmala UI"/>
+        <a:font script="Osma" typeface="Ebrima"/>
+        <a:font script="Phag" typeface="Phagspa"/>
+        <a:font script="Syrn" typeface="Estrangelo Edessa"/>
+        <a:font script="Syrj" typeface="Estrangelo Edessa"/>
+        <a:font script="Syre" typeface="Estrangelo Edessa"/>
+        <a:font script="Sora" typeface="Nirmala UI"/>
+        <a:font script="Tale" typeface="Microsoft Tai Le"/>
+        <a:font script="Talu" typeface="Microsoft New Tai Lue"/>
+        <a:font script="Tfng" typeface="Ebrima"/>
+      </a:minorFont>
+    </a:fontScheme>
+    <a:fmtScheme name="Office">
+      <a:fillStyleLst>
+        <a:solidFill>
+          <a:schemeClr val="phClr"/>
+        </a:solidFill>
+        <a:gradFill rotWithShape="1">
+          <a:gsLst>
+            <a:gs pos="0">
+              <a:schemeClr val="phClr">
+                <a:lumMod val="110000"/>
+                <a:satMod val="105000"/>
+                <a:tint val="67000"/>
+              </a:schemeClr>
+            </a:gs>
+            <a:gs pos="50000">
+              <a:schemeClr val="phClr">
+                <a:lumMod val="105000"/>
+                <a:satMod val="103000"/>
+                <a:tint val="73000"/>
+              </a:schemeClr>
+            </a:gs>
+            <a:gs pos="100000">
+              <a:schemeClr val="phClr">
+                <a:lumMod val="105000"/>
+                <a:satMod val="109000"/>
+                <a:tint val="81000"/>
+              </a:schemeClr>
+            </a:gs>
+          </a:gsLst>
+          <a:lin ang="5400000" scaled="0"/>
+        </a:gradFill>
+        <a:gradFill rotWithShape="1">
+          <a:gsLst>
+            <a:gs pos="0">
+              <a:schemeClr val="phClr">
+                <a:satMod val="103000"/>
+                <a:lumMod val="102000"/>
+                <a:tint val="94000"/>
+              </a:schemeClr>
+            </a:gs>
+            <a:gs pos="50000">
+              <a:schemeClr val="phClr">
+                <a:satMod val="110000"/>
+                <a:lumMod val="100000"/>
+                <a:shade val="100000"/>
+              </a:schemeClr>
+            </a:gs>
+            <a:gs pos="100000">
+              <a:schemeClr val="phClr">
+                <a:lumMod val="99000"/>
+                <a:satMod val="120000"/>
+                <a:shade val="78000"/>
+              </a:schemeClr>
+            </a:gs>
+          </a:gsLst>
+          <a:lin ang="5400000" scaled="0"/>
+        </a:gradFill>
+      </a:fillStyleLst>
+      <a:lnStyleLst>
+        <a:ln w="6350" cap="flat" cmpd="sng" algn="ctr">
+          <a:solidFill>
+            <a:schemeClr val="phClr"/>
+          </a:solidFill>
+          <a:prstDash val="solid"/>
+          <a:miter lim="800000"/>
+        </a:ln>
+        <a:ln w="12700" cap="flat" cmpd="sng" algn="ctr">
+          <a:solidFill>
+            <a:schemeClr val="phClr"/>
+          </a:solidFill>
+          <a:prstDash val="solid"/>
+          <a:miter lim="800000"/>
+        </a:ln>
+        <a:ln w="19050" cap="flat" cmpd="sng" algn="ctr">
+          <a:solidFill>
+            <a:schemeClr val="phClr"/>
+          </a:solidFill>
+          <a:prstDash val="solid"/>
+          <a:miter lim="800000"/>
+        </a:ln>
+      </a:lnStyleLst>
+      <a:effectStyleLst>
+        <a:effectStyle>
+          <a:effectLst/>
+        </a:effectStyle>
+        <a:effectStyle>
+          <a:effectLst/>
+        </a:effectStyle>
+        <a:effectStyle>
+          <a:effectLst>
+            <a:outerShdw blurRad="57150" dist="19050" dir="5400000" algn="ctr" rotWithShape="0">
+              <a:srgbClr val="000000">
+                <a:alpha val="63000"/>
+              </a:srgbClr>
+            </a:outerShdw>
+          </a:effectLst>
+        </a:effectStyle>
+      </a:effectStyleLst>
+      <a:bgFillStyleLst>
+        <a:solidFill>
+          <a:schemeClr val="phClr"/>
+        </a:solidFill>
+        <a:solidFill>
+          <a:schemeClr val="phClr">
+            <a:tint val="95000"/>
+            <a:satMod val="170000"/>
+          </a:schemeClr>
+        </a:solidFill>
+        <a:gradFill rotWithShape="1">
+          <a:gsLst>
+            <a:gs pos="0">
+              <a:schemeClr val="phClr">
+                <a:tint val="93000"/>
+                <a:satMod val="150000"/>
+                <a:shade val="98000"/>
+                <a:lumMod val="102000"/>
+              </a:schemeClr>
+            </a:gs>
+            <a:gs pos="50000">
+              <a:schemeClr val="phClr">
+                <a:tint val="98000"/>
+                <a:satMod val="130000"/>
+                <a:shade val="90000"/>
+                <a:lumMod val="103000"/>
+              </a:schemeClr>
+            </a:gs>
+            <a:gs pos="100000">
+              <a:schemeClr val="phClr">
+                <a:shade val="63000"/>
+                <a:satMod val="120000"/>
+              </a:schemeClr>
+            </a:gs>
+          </a:gsLst>
+          <a:lin ang="5400000" scaled="0"/>
+        </a:gradFill>
+      </a:bgFillStyleLst>
+    </a:fmtScheme>
+  </a:themeElements>
+  <a:objectDefaults/>
+  <a:extraClrSchemeLst/>
+  <a:extLst>
+    <a:ext uri="{05A4C25C-085E-4340-85A3-A5531E510DB2}">
+      <thm15:themeFamily xmlns:thm15="http://schemas.microsoft.com/office/thememl/2012/main" name="Office Theme" id="{62F939B6-93AF-4DB8-9C6B-D6C7DFDC589F}" vid="{4A3C46E8-61CC-4603-A589-7422A47A8E4A}"/>
+    </a:ext>
+  </a:extLst>
+</a:theme>
 </file>